--- a/exports/pptx/lessons/middle-module-07-eleven-multiplication/day-10-final-assessment.pptx
+++ b/exports/pptx/lessons/middle-module-07-eleven-multiplication/day-10-final-assessment.pptx
@@ -17,9 +17,10 @@
     <p:sldId id="265" r:id="rId11"/>
     <p:sldId id="266" r:id="rId12"/>
     <p:sldId id="267" r:id="rId13"/>
+    <p:sldId id="268" r:id="rId14"/>
   </p:sldIdLst>
   <p:notesMasterIdLst>
-    <p:notesMasterId r:id="rId14"/>
+    <p:notesMasterId r:id="rId15"/>
   </p:notesMasterIdLst>
   <p:sldSz cx="9144000" cy="5143500"/>
   <p:notesSz cx="5143500" cy="9144000"/>
@@ -801,6 +802,94 @@
             <a:fld id="{F7021451-1387-4CA6-816F-3879F97B5CBC}" type="slidenum">
               <a:rPr lang="en-US"/>
               <a:t>12</a:t>
+            </a:fld>
+            <a:endParaRPr lang="en-US"/>
+          </a:p>
+        </p:txBody>
+      </p:sp>
+    </p:spTree>
+    <p:extLst>
+      <p:ext uri="{BB962C8B-B14F-4D97-AF65-F5344CB8AC3E}">
+        <p14:creationId xmlns:p14="http://schemas.microsoft.com/office/powerpoint/2010/main" val="1024086991"/>
+      </p:ext>
+    </p:extLst>
+  </p:cSld>
+  <p:clrMapOvr>
+    <a:masterClrMapping/>
+  </p:clrMapOvr>
+</p:notes>
+</file>
+
+<file path=ppt/notesSlides/notesSlide13.xml><?xml version="1.0" encoding="utf-8"?>
+<p:notes xmlns:a="http://schemas.openxmlformats.org/drawingml/2006/main" xmlns:r="http://schemas.openxmlformats.org/officeDocument/2006/relationships" xmlns:p="http://schemas.openxmlformats.org/presentationml/2006/main">
+  <p:cSld>
+    <p:spTree>
+      <p:nvGrpSpPr>
+        <p:cNvPr id="1" name=""/>
+        <p:cNvGrpSpPr/>
+        <p:nvPr/>
+      </p:nvGrpSpPr>
+      <p:grpSpPr>
+        <a:xfrm>
+          <a:off x="0" y="0"/>
+          <a:ext cx="0" cy="0"/>
+          <a:chOff x="0" y="0"/>
+          <a:chExt cx="0" cy="0"/>
+        </a:xfrm>
+      </p:grpSpPr>
+      <p:sp>
+        <p:nvSpPr>
+          <p:cNvPr id="2" name="Slide Image Placeholder 1"/>
+          <p:cNvSpPr>
+            <a:spLocks noGrp="1" noRot="1" noChangeAspect="1"/>
+          </p:cNvSpPr>
+          <p:nvPr>
+            <p:ph type="sldImg"/>
+          </p:nvPr>
+        </p:nvSpPr>
+        <p:spPr/>
+      </p:sp>
+      <p:sp>
+        <p:nvSpPr>
+          <p:cNvPr id="3" name="Notes Placeholder 2"/>
+          <p:cNvSpPr>
+            <a:spLocks noGrp="1"/>
+          </p:cNvSpPr>
+          <p:nvPr>
+            <p:ph type="body" idx="1"/>
+          </p:nvPr>
+        </p:nvSpPr>
+        <p:spPr/>
+        <p:txBody>
+          <a:bodyPr/>
+          <a:lstStyle/>
+          <a:p>
+            <a:r>
+              <a:rPr lang="en-US" dirty="0"/>
+              <a:t/>
+            </a:r>
+            <a:endParaRPr lang="en-US" dirty="0"/>
+          </a:p>
+        </p:txBody>
+      </p:sp>
+      <p:sp>
+        <p:nvSpPr>
+          <p:cNvPr id="4" name="Slide Number Placeholder 3"/>
+          <p:cNvSpPr>
+            <a:spLocks noGrp="1"/>
+          </p:cNvSpPr>
+          <p:nvPr>
+            <p:ph type="sldNum" sz="quarter" idx="10"/>
+          </p:nvPr>
+        </p:nvSpPr>
+        <p:spPr/>
+        <p:txBody>
+          <a:bodyPr/>
+          <a:lstStyle/>
+          <a:p>
+            <a:fld id="{F7021451-1387-4CA6-816F-3879F97B5CBC}" type="slidenum">
+              <a:rPr lang="en-US"/>
+              <a:t>13</a:t>
             </a:fld>
             <a:endParaRPr lang="en-US"/>
           </a:p>
@@ -2146,102 +2235,6 @@
         </p:nvSpPr>
         <p:spPr>
           <a:xfrm>
-            <a:off x="406301" y="1223963"/>
-            <a:ext cx="8498026" cy="274290"/>
-          </a:xfrm>
-          <a:prstGeom prst="rect">
-            <a:avLst/>
-          </a:prstGeom>
-          <a:noFill/>
-          <a:ln/>
-        </p:spPr>
-        <p:txBody>
-          <a:bodyPr wrap="square" lIns="0" tIns="0" rIns="0" bIns="0" rtlCol="0" anchor="t"/>
-          <a:lstStyle/>
-          <a:p>
-            <a:pPr algn="l" indent="0" marL="0">
-              <a:lnSpc>
-                <a:spcPts val="2160"/>
-              </a:lnSpc>
-              <a:spcBef>
-                <a:spcPts val="600"/>
-              </a:spcBef>
-              <a:spcAft>
-                <a:spcPts val="800"/>
-              </a:spcAft>
-              <a:buNone/>
-            </a:pPr>
-            <a:r>
-              <a:rPr lang="en-US" sz="1800" b="1" dirty="0">
-                <a:solidFill>
-                  <a:srgbClr val="FE4447"/>
-                </a:solidFill>
-                <a:latin typeface="Georgia" pitchFamily="34" charset="0"/>
-                <a:ea typeface="Georgia" pitchFamily="34" charset="-122"/>
-                <a:cs typeface="Georgia" pitchFamily="34" charset="-120"/>
-              </a:rPr>
-              <a:t>Learning objective</a:t>
-            </a:r>
-            <a:endParaRPr lang="en-US" sz="1800" dirty="0"/>
-          </a:p>
-        </p:txBody>
-      </p:sp>
-      <p:sp>
-        <p:nvSpPr>
-          <p:cNvPr id="6" name="Text 4"/>
-          <p:cNvSpPr/>
-          <p:nvPr/>
-        </p:nvSpPr>
-        <p:spPr>
-          <a:xfrm>
-            <a:off x="406301" y="1637854"/>
-            <a:ext cx="8498026" cy="426541"/>
-          </a:xfrm>
-          <a:prstGeom prst="rect">
-            <a:avLst/>
-          </a:prstGeom>
-          <a:noFill/>
-          <a:ln/>
-        </p:spPr>
-        <p:txBody>
-          <a:bodyPr wrap="square" lIns="0" tIns="0" rIns="0" bIns="0" rtlCol="0" anchor="t"/>
-          <a:lstStyle/>
-          <a:p>
-            <a:pPr algn="l" indent="0" marL="0">
-              <a:lnSpc>
-                <a:spcPts val="1680"/>
-              </a:lnSpc>
-              <a:spcBef>
-                <a:spcPts val="300"/>
-              </a:spcBef>
-              <a:spcAft>
-                <a:spcPts val="300"/>
-              </a:spcAft>
-              <a:buNone/>
-            </a:pPr>
-            <a:r>
-              <a:rPr lang="en-US" sz="1200" dirty="0">
-                <a:solidFill>
-                  <a:srgbClr val="1C2833"/>
-                </a:solidFill>
-                <a:latin typeface="Arial" pitchFamily="34" charset="0"/>
-                <a:ea typeface="Arial" pitchFamily="34" charset="-122"/>
-                <a:cs typeface="Arial" pitchFamily="34" charset="-120"/>
-              </a:rPr>
-              <a:t>By the end of this lesson, students will demonstrate mastery of the ×11 family of techniques via a summative quiz and a 2-minute project presentation.</a:t>
-            </a:r>
-            <a:endParaRPr lang="en-US" sz="1200" dirty="0"/>
-          </a:p>
-        </p:txBody>
-      </p:sp>
-      <p:sp>
-        <p:nvSpPr>
-          <p:cNvPr id="7" name="Text 5"/>
-          <p:cNvSpPr/>
-          <p:nvPr/>
-        </p:nvSpPr>
-        <p:spPr>
-          <a:xfrm>
             <a:off x="406301" y="4434929"/>
             <a:ext cx="8498026" cy="213271"/>
           </a:xfrm>
@@ -2386,7 +2379,7 @@
                 <a:ea typeface="Georgia" pitchFamily="34" charset="-122"/>
                 <a:cs typeface="Georgia" pitchFamily="34" charset="-120"/>
               </a:rPr>
-              <a:t>Differentiation</a:t>
+              <a:t>Homework</a:t>
             </a:r>
             <a:endParaRPr lang="en-US" sz="1800" dirty="0"/>
           </a:p>
@@ -2401,7 +2394,7 @@
         <p:spPr>
           <a:xfrm>
             <a:off x="634901" y="883593"/>
-            <a:ext cx="8102798" cy="525661"/>
+            <a:ext cx="8102798" cy="281880"/>
           </a:xfrm>
           <a:prstGeom prst="rect">
             <a:avLst/>
@@ -2424,7 +2417,7 @@
               <a:buChar char="•"/>
             </a:pPr>
             <a:r>
-              <a:rPr lang="en-US" sz="1200" b="1" dirty="0">
+              <a:rPr lang="en-US" sz="1200" dirty="0">
                 <a:solidFill>
                   <a:srgbClr val="1C2833"/>
                 </a:solidFill>
@@ -2432,71 +2425,7 @@
                 <a:ea typeface="Arial" pitchFamily="34" charset="-122"/>
                 <a:cs typeface="Arial" pitchFamily="34" charset="-120"/>
               </a:rPr>
-              <a:t>Tier up:</a:t>
-            </a:r>
-            <a:pPr algn="l" indent="0" marL="0">
-              <a:lnSpc>
-                <a:spcPts val="1620"/>
-              </a:lnSpc>
-              <a:spcAft>
-                <a:spcPts val="300"/>
-              </a:spcAft>
-              <a:buNone/>
-            </a:pPr>
-            <a:r>
-              <a:rPr lang="en-US" sz="1200" dirty="0">
-                <a:solidFill>
-                  <a:srgbClr val="1C2833"/>
-                </a:solidFill>
-                <a:latin typeface="Arial" pitchFamily="34" charset="0"/>
-                <a:ea typeface="Arial" pitchFamily="34" charset="-122"/>
-                <a:cs typeface="Arial" pitchFamily="34" charset="-120"/>
-              </a:rPr>
-              <a:t> Students finishing the quiz early can attempt a bonus "challenge" sheet — 4-digit × 11 plus a 2-digit × 19 mix.</a:t>
-            </a:r>
-            <a:endParaRPr lang="en-US" sz="1200" dirty="0"/>
-          </a:p>
-          <a:p>
-            <a:pPr algn="l" marL="342900" indent="-342900">
-              <a:lnSpc>
-                <a:spcPts val="1620"/>
-              </a:lnSpc>
-              <a:spcAft>
-                <a:spcPts val="300"/>
-              </a:spcAft>
-              <a:buSzPct val="100000"/>
-              <a:buChar char="•"/>
-            </a:pPr>
-            <a:r>
-              <a:rPr lang="en-US" sz="1200" b="1" dirty="0">
-                <a:solidFill>
-                  <a:srgbClr val="1C2833"/>
-                </a:solidFill>
-                <a:latin typeface="Arial" pitchFamily="34" charset="0"/>
-                <a:ea typeface="Arial" pitchFamily="34" charset="-122"/>
-                <a:cs typeface="Arial" pitchFamily="34" charset="-120"/>
-              </a:rPr>
-              <a:t>Tier down:</a:t>
-            </a:r>
-            <a:pPr algn="l" indent="0" marL="0">
-              <a:lnSpc>
-                <a:spcPts val="1620"/>
-              </a:lnSpc>
-              <a:spcAft>
-                <a:spcPts val="300"/>
-              </a:spcAft>
-              <a:buNone/>
-            </a:pPr>
-            <a:r>
-              <a:rPr lang="en-US" sz="1200" dirty="0">
-                <a:solidFill>
-                  <a:srgbClr val="1C2833"/>
-                </a:solidFill>
-                <a:latin typeface="Arial" pitchFamily="34" charset="0"/>
-                <a:ea typeface="Arial" pitchFamily="34" charset="-122"/>
-                <a:cs typeface="Arial" pitchFamily="34" charset="-120"/>
-              </a:rPr>
-              <a:t> Open-notebook quiz for students with documented learning needs.</a:t>
+              <a:t>None. Module is complete.</a:t>
             </a:r>
             <a:endParaRPr lang="en-US" sz="1200" dirty="0"/>
           </a:p>
@@ -2654,7 +2583,7 @@
                 <a:ea typeface="Georgia" pitchFamily="34" charset="-122"/>
                 <a:cs typeface="Georgia" pitchFamily="34" charset="-120"/>
               </a:rPr>
-              <a:t>Teacher notes</a:t>
+              <a:t>Differentiation</a:t>
             </a:r>
             <a:endParaRPr lang="en-US" sz="1800" dirty="0"/>
           </a:p>
@@ -2668,8 +2597,8 @@
         </p:nvSpPr>
         <p:spPr>
           <a:xfrm>
-            <a:off x="406301" y="870942"/>
-            <a:ext cx="8498026" cy="426541"/>
+            <a:off x="634901" y="883593"/>
+            <a:ext cx="8102798" cy="525661"/>
           </a:xfrm>
           <a:prstGeom prst="rect">
             <a:avLst/>
@@ -2681,20 +2610,18 @@
           <a:bodyPr wrap="square" lIns="0" tIns="0" rIns="0" bIns="0" rtlCol="0" anchor="t"/>
           <a:lstStyle/>
           <a:p>
-            <a:pPr algn="l" indent="0" marL="0">
-              <a:lnSpc>
-                <a:spcPts val="1680"/>
-              </a:lnSpc>
-              <a:spcBef>
-                <a:spcPts val="300"/>
-              </a:spcBef>
-              <a:spcAft>
-                <a:spcPts val="300"/>
-              </a:spcAft>
-              <a:buNone/>
-            </a:pPr>
-            <a:r>
-              <a:rPr lang="en-US" sz="1200" dirty="0">
+            <a:pPr algn="l" marL="342900" indent="-342900">
+              <a:lnSpc>
+                <a:spcPts val="1620"/>
+              </a:lnSpc>
+              <a:spcAft>
+                <a:spcPts val="300"/>
+              </a:spcAft>
+              <a:buSzPct val="100000"/>
+              <a:buChar char="•"/>
+            </a:pPr>
+            <a:r>
+              <a:rPr lang="en-US" sz="1200" b="1" dirty="0">
                 <a:solidFill>
                   <a:srgbClr val="1C2833"/>
                 </a:solidFill>
@@ -2702,7 +2629,71 @@
                 <a:ea typeface="Arial" pitchFamily="34" charset="-122"/>
                 <a:cs typeface="Arial" pitchFamily="34" charset="-120"/>
               </a:rPr>
-              <a:t>– Mark the quiz immediately after class while the presentations are fresh. – Don't rush the reflection — the "did your view change?" question is the cultural-honesty payoff of the module. – If presentations spill into Day 11, protect that time.</a:t>
+              <a:t>Tier up:</a:t>
+            </a:r>
+            <a:pPr algn="l" indent="0" marL="0">
+              <a:lnSpc>
+                <a:spcPts val="1620"/>
+              </a:lnSpc>
+              <a:spcAft>
+                <a:spcPts val="300"/>
+              </a:spcAft>
+              <a:buNone/>
+            </a:pPr>
+            <a:r>
+              <a:rPr lang="en-US" sz="1200" dirty="0">
+                <a:solidFill>
+                  <a:srgbClr val="1C2833"/>
+                </a:solidFill>
+                <a:latin typeface="Arial" pitchFamily="34" charset="0"/>
+                <a:ea typeface="Arial" pitchFamily="34" charset="-122"/>
+                <a:cs typeface="Arial" pitchFamily="34" charset="-120"/>
+              </a:rPr>
+              <a:t> Students finishing the quiz early can attempt a bonus "challenge" sheet — 4-digit × 11 plus a 2-digit × 19 mix.</a:t>
+            </a:r>
+            <a:endParaRPr lang="en-US" sz="1200" dirty="0"/>
+          </a:p>
+          <a:p>
+            <a:pPr algn="l" marL="342900" indent="-342900">
+              <a:lnSpc>
+                <a:spcPts val="1620"/>
+              </a:lnSpc>
+              <a:spcAft>
+                <a:spcPts val="300"/>
+              </a:spcAft>
+              <a:buSzPct val="100000"/>
+              <a:buChar char="•"/>
+            </a:pPr>
+            <a:r>
+              <a:rPr lang="en-US" sz="1200" b="1" dirty="0">
+                <a:solidFill>
+                  <a:srgbClr val="1C2833"/>
+                </a:solidFill>
+                <a:latin typeface="Arial" pitchFamily="34" charset="0"/>
+                <a:ea typeface="Arial" pitchFamily="34" charset="-122"/>
+                <a:cs typeface="Arial" pitchFamily="34" charset="-120"/>
+              </a:rPr>
+              <a:t>Tier down:</a:t>
+            </a:r>
+            <a:pPr algn="l" indent="0" marL="0">
+              <a:lnSpc>
+                <a:spcPts val="1620"/>
+              </a:lnSpc>
+              <a:spcAft>
+                <a:spcPts val="300"/>
+              </a:spcAft>
+              <a:buNone/>
+            </a:pPr>
+            <a:r>
+              <a:rPr lang="en-US" sz="1200" dirty="0">
+                <a:solidFill>
+                  <a:srgbClr val="1C2833"/>
+                </a:solidFill>
+                <a:latin typeface="Arial" pitchFamily="34" charset="0"/>
+                <a:ea typeface="Arial" pitchFamily="34" charset="-122"/>
+                <a:cs typeface="Arial" pitchFamily="34" charset="-120"/>
+              </a:rPr>
+              <a:t> Open-notebook quiz for students with documented learning needs.</a:t>
             </a:r>
             <a:endParaRPr lang="en-US" sz="1200" dirty="0"/>
           </a:p>
@@ -2860,7 +2851,7 @@
                 <a:ea typeface="Georgia" pitchFamily="34" charset="-122"/>
                 <a:cs typeface="Georgia" pitchFamily="34" charset="-120"/>
               </a:rPr>
-              <a:t>Citation(s) used in this lesson</a:t>
+              <a:t>Teacher notes</a:t>
             </a:r>
             <a:endParaRPr lang="en-US" sz="1800" dirty="0"/>
           </a:p>
@@ -2874,8 +2865,8 @@
         </p:nvSpPr>
         <p:spPr>
           <a:xfrm>
-            <a:off x="406301" y="870942"/>
-            <a:ext cx="8498026" cy="213271"/>
+            <a:off x="634901" y="883593"/>
+            <a:ext cx="8102798" cy="769441"/>
           </a:xfrm>
           <a:prstGeom prst="rect">
             <a:avLst/>
@@ -2887,17 +2878,15 @@
           <a:bodyPr wrap="square" lIns="0" tIns="0" rIns="0" bIns="0" rtlCol="0" anchor="t"/>
           <a:lstStyle/>
           <a:p>
-            <a:pPr algn="l" indent="0" marL="0">
-              <a:lnSpc>
-                <a:spcPts val="1680"/>
-              </a:lnSpc>
-              <a:spcBef>
-                <a:spcPts val="300"/>
-              </a:spcBef>
-              <a:spcAft>
-                <a:spcPts val="300"/>
-              </a:spcAft>
-              <a:buNone/>
+            <a:pPr algn="l" marL="342900" indent="-342900">
+              <a:lnSpc>
+                <a:spcPts val="1620"/>
+              </a:lnSpc>
+              <a:spcAft>
+                <a:spcPts val="300"/>
+              </a:spcAft>
+              <a:buSzPct val="100000"/>
+              <a:buChar char="•"/>
             </a:pPr>
             <a:r>
               <a:rPr lang="en-US" sz="1200" dirty="0">
@@ -2908,7 +2897,259 @@
                 <a:ea typeface="Arial" pitchFamily="34" charset="-122"/>
                 <a:cs typeface="Arial" pitchFamily="34" charset="-120"/>
               </a:rPr>
-              <a:t>– All sources verified across the module.</a:t>
+              <a:t>Mark the quiz immediately after class while the presentations are fresh.</a:t>
+            </a:r>
+            <a:endParaRPr lang="en-US" sz="1200" dirty="0"/>
+          </a:p>
+          <a:p>
+            <a:pPr algn="l" marL="342900" indent="-342900">
+              <a:lnSpc>
+                <a:spcPts val="1620"/>
+              </a:lnSpc>
+              <a:spcAft>
+                <a:spcPts val="300"/>
+              </a:spcAft>
+              <a:buSzPct val="100000"/>
+              <a:buChar char="•"/>
+            </a:pPr>
+            <a:r>
+              <a:rPr lang="en-US" sz="1200" dirty="0">
+                <a:solidFill>
+                  <a:srgbClr val="1C2833"/>
+                </a:solidFill>
+                <a:latin typeface="Arial" pitchFamily="34" charset="0"/>
+                <a:ea typeface="Arial" pitchFamily="34" charset="-122"/>
+                <a:cs typeface="Arial" pitchFamily="34" charset="-120"/>
+              </a:rPr>
+              <a:t>Don't rush the reflection — the "did your view change?" question is the cultural-honesty payoff of the module.</a:t>
+            </a:r>
+            <a:endParaRPr lang="en-US" sz="1200" dirty="0"/>
+          </a:p>
+          <a:p>
+            <a:pPr algn="l" marL="342900" indent="-342900">
+              <a:lnSpc>
+                <a:spcPts val="1620"/>
+              </a:lnSpc>
+              <a:spcAft>
+                <a:spcPts val="300"/>
+              </a:spcAft>
+              <a:buSzPct val="100000"/>
+              <a:buChar char="•"/>
+            </a:pPr>
+            <a:r>
+              <a:rPr lang="en-US" sz="1200" dirty="0">
+                <a:solidFill>
+                  <a:srgbClr val="1C2833"/>
+                </a:solidFill>
+                <a:latin typeface="Arial" pitchFamily="34" charset="0"/>
+                <a:ea typeface="Arial" pitchFamily="34" charset="-122"/>
+                <a:cs typeface="Arial" pitchFamily="34" charset="-120"/>
+              </a:rPr>
+              <a:t>If presentations spill into Day 11, protect that time.</a:t>
+            </a:r>
+            <a:endParaRPr lang="en-US" sz="1200" dirty="0"/>
+          </a:p>
+        </p:txBody>
+      </p:sp>
+      <p:sp>
+        <p:nvSpPr>
+          <p:cNvPr id="5" name="Text 3"/>
+          <p:cNvSpPr/>
+          <p:nvPr/>
+        </p:nvSpPr>
+        <p:spPr>
+          <a:xfrm>
+            <a:off x="406301" y="4434929"/>
+            <a:ext cx="8498026" cy="213271"/>
+          </a:xfrm>
+          <a:prstGeom prst="rect">
+            <a:avLst/>
+          </a:prstGeom>
+          <a:noFill/>
+          <a:ln/>
+        </p:spPr>
+        <p:txBody>
+          <a:bodyPr wrap="square" lIns="0" tIns="0" rIns="0" bIns="0" rtlCol="0" anchor="t"/>
+          <a:lstStyle/>
+          <a:p>
+            <a:pPr algn="l" indent="0" marL="0">
+              <a:lnSpc>
+                <a:spcPts val="1680"/>
+              </a:lnSpc>
+              <a:spcBef>
+                <a:spcPts val="300"/>
+              </a:spcBef>
+              <a:spcAft>
+                <a:spcPts val="300"/>
+              </a:spcAft>
+              <a:buNone/>
+            </a:pPr>
+            <a:r>
+              <a:rPr lang="en-US" sz="1200" dirty="0">
+                <a:solidFill>
+                  <a:srgbClr val="1C2833"/>
+                </a:solidFill>
+                <a:latin typeface="Arial" pitchFamily="34" charset="0"/>
+                <a:ea typeface="Arial" pitchFamily="34" charset="-122"/>
+                <a:cs typeface="Arial" pitchFamily="34" charset="-120"/>
+              </a:rPr>
+              <a:t>Middle ·  · IKS Curriculum</a:t>
+            </a:r>
+            <a:endParaRPr lang="en-US" sz="1200" dirty="0"/>
+          </a:p>
+        </p:txBody>
+      </p:sp>
+    </p:spTree>
+  </p:cSld>
+  <p:clrMapOvr>
+    <a:masterClrMapping/>
+  </p:clrMapOvr>
+</p:sld>
+</file>
+
+<file path=ppt/slides/slide13.xml><?xml version="1.0" encoding="utf-8"?>
+<p:sld xmlns:a="http://schemas.openxmlformats.org/drawingml/2006/main" xmlns:r="http://schemas.openxmlformats.org/officeDocument/2006/relationships" xmlns:p="http://schemas.openxmlformats.org/presentationml/2006/main">
+  <p:cSld name="Slide 13">
+    <p:bg>
+      <p:bgPr>
+        <a:solidFill>
+          <a:srgbClr val="FFFFFF"/>
+        </a:solidFill>
+      </p:bgPr>
+    </p:bg>
+    <p:spTree>
+      <p:nvGrpSpPr>
+        <p:cNvPr id="1" name=""/>
+        <p:cNvGrpSpPr/>
+        <p:nvPr/>
+      </p:nvGrpSpPr>
+      <p:grpSpPr>
+        <a:xfrm>
+          <a:off x="0" y="0"/>
+          <a:ext cx="0" cy="0"/>
+          <a:chOff x="0" y="0"/>
+          <a:chExt cx="0" cy="0"/>
+        </a:xfrm>
+      </p:grpSpPr>
+      <p:sp>
+        <p:nvSpPr>
+          <p:cNvPr id="2" name="Text 0"/>
+          <p:cNvSpPr/>
+          <p:nvPr/>
+        </p:nvSpPr>
+        <p:spPr>
+          <a:xfrm>
+            <a:off x="0" y="0"/>
+            <a:ext cx="9144000" cy="101501"/>
+          </a:xfrm>
+          <a:prstGeom prst="rect">
+            <a:avLst/>
+          </a:prstGeom>
+          <a:solidFill>
+            <a:srgbClr val="277884"/>
+          </a:solidFill>
+          <a:ln/>
+        </p:spPr>
+        <p:txBody>
+          <a:bodyPr wrap="square" rtlCol="0" anchor="ctr"/>
+          <a:lstStyle/>
+          <a:p>
+            <a:pPr indent="0" marL="0">
+              <a:buNone/>
+            </a:pPr>
+            <a:endParaRPr lang="en-US" dirty="0"/>
+          </a:p>
+        </p:txBody>
+      </p:sp>
+      <p:sp>
+        <p:nvSpPr>
+          <p:cNvPr id="3" name="Text 1"/>
+          <p:cNvSpPr/>
+          <p:nvPr/>
+        </p:nvSpPr>
+        <p:spPr>
+          <a:xfrm>
+            <a:off x="406301" y="457051"/>
+            <a:ext cx="8498026" cy="274290"/>
+          </a:xfrm>
+          <a:prstGeom prst="rect">
+            <a:avLst/>
+          </a:prstGeom>
+          <a:noFill/>
+          <a:ln/>
+        </p:spPr>
+        <p:txBody>
+          <a:bodyPr wrap="square" lIns="0" tIns="0" rIns="0" bIns="0" rtlCol="0" anchor="t"/>
+          <a:lstStyle/>
+          <a:p>
+            <a:pPr algn="l" indent="0" marL="0">
+              <a:lnSpc>
+                <a:spcPts val="2160"/>
+              </a:lnSpc>
+              <a:spcBef>
+                <a:spcPts val="600"/>
+              </a:spcBef>
+              <a:spcAft>
+                <a:spcPts val="800"/>
+              </a:spcAft>
+              <a:buNone/>
+            </a:pPr>
+            <a:r>
+              <a:rPr lang="en-US" sz="1800" b="1" dirty="0">
+                <a:solidFill>
+                  <a:srgbClr val="FE4447"/>
+                </a:solidFill>
+                <a:latin typeface="Georgia" pitchFamily="34" charset="0"/>
+                <a:ea typeface="Georgia" pitchFamily="34" charset="-122"/>
+                <a:cs typeface="Georgia" pitchFamily="34" charset="-120"/>
+              </a:rPr>
+              <a:t>Citation(s) used in this lesson</a:t>
+            </a:r>
+            <a:endParaRPr lang="en-US" sz="1800" dirty="0"/>
+          </a:p>
+        </p:txBody>
+      </p:sp>
+      <p:sp>
+        <p:nvSpPr>
+          <p:cNvPr id="4" name="Text 2"/>
+          <p:cNvSpPr/>
+          <p:nvPr/>
+        </p:nvSpPr>
+        <p:spPr>
+          <a:xfrm>
+            <a:off x="634901" y="883593"/>
+            <a:ext cx="8102798" cy="281880"/>
+          </a:xfrm>
+          <a:prstGeom prst="rect">
+            <a:avLst/>
+          </a:prstGeom>
+          <a:noFill/>
+          <a:ln/>
+        </p:spPr>
+        <p:txBody>
+          <a:bodyPr wrap="square" lIns="0" tIns="0" rIns="0" bIns="0" rtlCol="0" anchor="t"/>
+          <a:lstStyle/>
+          <a:p>
+            <a:pPr algn="l" marL="342900" indent="-342900">
+              <a:lnSpc>
+                <a:spcPts val="1620"/>
+              </a:lnSpc>
+              <a:spcAft>
+                <a:spcPts val="300"/>
+              </a:spcAft>
+              <a:buSzPct val="100000"/>
+              <a:buChar char="•"/>
+            </a:pPr>
+            <a:r>
+              <a:rPr lang="en-US" sz="1200" dirty="0">
+                <a:solidFill>
+                  <a:srgbClr val="1C2833"/>
+                </a:solidFill>
+                <a:latin typeface="Arial" pitchFamily="34" charset="0"/>
+                <a:ea typeface="Arial" pitchFamily="34" charset="-122"/>
+                <a:cs typeface="Arial" pitchFamily="34" charset="-120"/>
+              </a:rPr>
+              <a:t>All sources verified across the module.</a:t>
             </a:r>
             <a:endParaRPr lang="en-US" sz="1200" dirty="0"/>
           </a:p>
@@ -3066,7 +3307,7 @@
                 <a:ea typeface="Georgia" pitchFamily="34" charset="-122"/>
                 <a:cs typeface="Georgia" pitchFamily="34" charset="-120"/>
               </a:rPr>
-              <a:t>Materials</a:t>
+              <a:t>Learning objective</a:t>
             </a:r>
             <a:endParaRPr lang="en-US" sz="1800" dirty="0"/>
           </a:p>
@@ -3081,7 +3322,7 @@
         <p:spPr>
           <a:xfrm>
             <a:off x="406301" y="870942"/>
-            <a:ext cx="8498026" cy="436066"/>
+            <a:ext cx="8498026" cy="426541"/>
           </a:xfrm>
           <a:prstGeom prst="rect">
             <a:avLst/>
@@ -3114,99 +3355,7 @@
                 <a:ea typeface="Arial" pitchFamily="34" charset="-122"/>
                 <a:cs typeface="Arial" pitchFamily="34" charset="-120"/>
               </a:rPr>
-              <a:t>– Summative quiz (</a:t>
-            </a:r>
-            <a:pPr algn="l" indent="0" marL="0">
-              <a:lnSpc>
-                <a:spcPts val="1680"/>
-              </a:lnSpc>
-              <a:spcBef>
-                <a:spcPts val="300"/>
-              </a:spcBef>
-              <a:spcAft>
-                <a:spcPts val="300"/>
-              </a:spcAft>
-              <a:buNone/>
-            </a:pPr>
-            <a:r>
-              <a:rPr lang="en-US" sz="1200" dirty="0">
-                <a:solidFill>
-                  <a:srgbClr val="1C2833"/>
-                </a:solidFill>
-                <a:latin typeface="Arial" pitchFamily="34" charset="0"/>
-                <a:ea typeface="Arial" pitchFamily="34" charset="-122"/>
-                <a:cs typeface="Arial" pitchFamily="34" charset="-120"/>
-              </a:rPr>
-              <a:t>quizzes/summative.md</a:t>
-            </a:r>
-            <a:pPr algn="l" indent="0" marL="0">
-              <a:lnSpc>
-                <a:spcPts val="1680"/>
-              </a:lnSpc>
-              <a:spcBef>
-                <a:spcPts val="300"/>
-              </a:spcBef>
-              <a:spcAft>
-                <a:spcPts val="300"/>
-              </a:spcAft>
-              <a:buNone/>
-            </a:pPr>
-            <a:r>
-              <a:rPr lang="en-US" sz="1200" dirty="0">
-                <a:solidFill>
-                  <a:srgbClr val="1C2833"/>
-                </a:solidFill>
-                <a:latin typeface="Arial" pitchFamily="34" charset="0"/>
-                <a:ea typeface="Arial" pitchFamily="34" charset="-122"/>
-                <a:cs typeface="Arial" pitchFamily="34" charset="-120"/>
-              </a:rPr>
-              <a:t>). – Stopwatch. – Rubric (</a:t>
-            </a:r>
-            <a:pPr algn="l" indent="0" marL="0">
-              <a:lnSpc>
-                <a:spcPts val="1680"/>
-              </a:lnSpc>
-              <a:spcBef>
-                <a:spcPts val="300"/>
-              </a:spcBef>
-              <a:spcAft>
-                <a:spcPts val="300"/>
-              </a:spcAft>
-              <a:buNone/>
-            </a:pPr>
-            <a:r>
-              <a:rPr lang="en-US" sz="1200" dirty="0">
-                <a:solidFill>
-                  <a:srgbClr val="1C2833"/>
-                </a:solidFill>
-                <a:latin typeface="Arial" pitchFamily="34" charset="0"/>
-                <a:ea typeface="Arial" pitchFamily="34" charset="-122"/>
-                <a:cs typeface="Arial" pitchFamily="34" charset="-120"/>
-              </a:rPr>
-              <a:t>assessments/rubric.md</a:t>
-            </a:r>
-            <a:pPr algn="l" indent="0" marL="0">
-              <a:lnSpc>
-                <a:spcPts val="1680"/>
-              </a:lnSpc>
-              <a:spcBef>
-                <a:spcPts val="300"/>
-              </a:spcBef>
-              <a:spcAft>
-                <a:spcPts val="300"/>
-              </a:spcAft>
-              <a:buNone/>
-            </a:pPr>
-            <a:r>
-              <a:rPr lang="en-US" sz="1200" dirty="0">
-                <a:solidFill>
-                  <a:srgbClr val="1C2833"/>
-                </a:solidFill>
-                <a:latin typeface="Arial" pitchFamily="34" charset="0"/>
-                <a:ea typeface="Arial" pitchFamily="34" charset="-122"/>
-                <a:cs typeface="Arial" pitchFamily="34" charset="-120"/>
-              </a:rPr>
-              <a:t>) per pair. – Reflection slip per student.</a:t>
+              <a:t>By the end of this lesson, students will demonstrate mastery of the ×11 family of techniques via a summative quiz and a 2-minute project presentation.</a:t>
             </a:r>
             <a:endParaRPr lang="en-US" sz="1200" dirty="0"/>
           </a:p>
@@ -3364,7 +3513,7 @@
                 <a:ea typeface="Georgia" pitchFamily="34" charset="-122"/>
                 <a:cs typeface="Georgia" pitchFamily="34" charset="-120"/>
               </a:rPr>
-              <a:t>Lesson flow</a:t>
+              <a:t>Materials</a:t>
             </a:r>
             <a:endParaRPr lang="en-US" sz="1800" dirty="0"/>
           </a:p>
@@ -3373,6 +3522,204 @@
       <p:sp>
         <p:nvSpPr>
           <p:cNvPr id="4" name="Text 2"/>
+          <p:cNvSpPr/>
+          <p:nvPr/>
+        </p:nvSpPr>
+        <p:spPr>
+          <a:xfrm>
+            <a:off x="634901" y="883593"/>
+            <a:ext cx="8102798" cy="1051322"/>
+          </a:xfrm>
+          <a:prstGeom prst="rect">
+            <a:avLst/>
+          </a:prstGeom>
+          <a:noFill/>
+          <a:ln/>
+        </p:spPr>
+        <p:txBody>
+          <a:bodyPr wrap="square" lIns="0" tIns="0" rIns="0" bIns="0" rtlCol="0" anchor="t"/>
+          <a:lstStyle/>
+          <a:p>
+            <a:pPr algn="l" marL="342900" indent="-342900">
+              <a:lnSpc>
+                <a:spcPts val="1620"/>
+              </a:lnSpc>
+              <a:spcAft>
+                <a:spcPts val="300"/>
+              </a:spcAft>
+              <a:buSzPct val="100000"/>
+              <a:buChar char="•"/>
+            </a:pPr>
+            <a:r>
+              <a:rPr lang="en-US" sz="1200" dirty="0">
+                <a:solidFill>
+                  <a:srgbClr val="1C2833"/>
+                </a:solidFill>
+                <a:latin typeface="Arial" pitchFamily="34" charset="0"/>
+                <a:ea typeface="Arial" pitchFamily="34" charset="-122"/>
+                <a:cs typeface="Arial" pitchFamily="34" charset="-120"/>
+              </a:rPr>
+              <a:t>Summative quiz (</a:t>
+            </a:r>
+            <a:pPr algn="l" indent="0" marL="0">
+              <a:lnSpc>
+                <a:spcPts val="1620"/>
+              </a:lnSpc>
+              <a:spcAft>
+                <a:spcPts val="300"/>
+              </a:spcAft>
+              <a:buNone/>
+            </a:pPr>
+            <a:r>
+              <a:rPr lang="en-US" sz="1200" dirty="0">
+                <a:solidFill>
+                  <a:srgbClr val="1C2833"/>
+                </a:solidFill>
+                <a:latin typeface="Arial" pitchFamily="34" charset="0"/>
+                <a:ea typeface="Arial" pitchFamily="34" charset="-122"/>
+                <a:cs typeface="Arial" pitchFamily="34" charset="-120"/>
+              </a:rPr>
+              <a:t>quizzes/summative.md</a:t>
+            </a:r>
+            <a:pPr algn="l" indent="0" marL="0">
+              <a:lnSpc>
+                <a:spcPts val="1620"/>
+              </a:lnSpc>
+              <a:spcAft>
+                <a:spcPts val="300"/>
+              </a:spcAft>
+              <a:buNone/>
+            </a:pPr>
+            <a:r>
+              <a:rPr lang="en-US" sz="1200" dirty="0">
+                <a:solidFill>
+                  <a:srgbClr val="1C2833"/>
+                </a:solidFill>
+                <a:latin typeface="Arial" pitchFamily="34" charset="0"/>
+                <a:ea typeface="Arial" pitchFamily="34" charset="-122"/>
+                <a:cs typeface="Arial" pitchFamily="34" charset="-120"/>
+              </a:rPr>
+              <a:t>).</a:t>
+            </a:r>
+            <a:endParaRPr lang="en-US" sz="1200" dirty="0"/>
+          </a:p>
+          <a:p>
+            <a:pPr algn="l" marL="342900" indent="-342900">
+              <a:lnSpc>
+                <a:spcPts val="1620"/>
+              </a:lnSpc>
+              <a:spcAft>
+                <a:spcPts val="300"/>
+              </a:spcAft>
+              <a:buSzPct val="100000"/>
+              <a:buChar char="•"/>
+            </a:pPr>
+            <a:r>
+              <a:rPr lang="en-US" sz="1200" dirty="0">
+                <a:solidFill>
+                  <a:srgbClr val="1C2833"/>
+                </a:solidFill>
+                <a:latin typeface="Arial" pitchFamily="34" charset="0"/>
+                <a:ea typeface="Arial" pitchFamily="34" charset="-122"/>
+                <a:cs typeface="Arial" pitchFamily="34" charset="-120"/>
+              </a:rPr>
+              <a:t>Stopwatch.</a:t>
+            </a:r>
+            <a:endParaRPr lang="en-US" sz="1200" dirty="0"/>
+          </a:p>
+          <a:p>
+            <a:pPr algn="l" marL="342900" indent="-342900">
+              <a:lnSpc>
+                <a:spcPts val="1620"/>
+              </a:lnSpc>
+              <a:spcAft>
+                <a:spcPts val="300"/>
+              </a:spcAft>
+              <a:buSzPct val="100000"/>
+              <a:buChar char="•"/>
+            </a:pPr>
+            <a:r>
+              <a:rPr lang="en-US" sz="1200" dirty="0">
+                <a:solidFill>
+                  <a:srgbClr val="1C2833"/>
+                </a:solidFill>
+                <a:latin typeface="Arial" pitchFamily="34" charset="0"/>
+                <a:ea typeface="Arial" pitchFamily="34" charset="-122"/>
+                <a:cs typeface="Arial" pitchFamily="34" charset="-120"/>
+              </a:rPr>
+              <a:t>Rubric (</a:t>
+            </a:r>
+            <a:pPr algn="l" indent="0" marL="0">
+              <a:lnSpc>
+                <a:spcPts val="1620"/>
+              </a:lnSpc>
+              <a:spcAft>
+                <a:spcPts val="300"/>
+              </a:spcAft>
+              <a:buNone/>
+            </a:pPr>
+            <a:r>
+              <a:rPr lang="en-US" sz="1200" dirty="0">
+                <a:solidFill>
+                  <a:srgbClr val="1C2833"/>
+                </a:solidFill>
+                <a:latin typeface="Arial" pitchFamily="34" charset="0"/>
+                <a:ea typeface="Arial" pitchFamily="34" charset="-122"/>
+                <a:cs typeface="Arial" pitchFamily="34" charset="-120"/>
+              </a:rPr>
+              <a:t>assessments/rubric.md</a:t>
+            </a:r>
+            <a:pPr algn="l" indent="0" marL="0">
+              <a:lnSpc>
+                <a:spcPts val="1620"/>
+              </a:lnSpc>
+              <a:spcAft>
+                <a:spcPts val="300"/>
+              </a:spcAft>
+              <a:buNone/>
+            </a:pPr>
+            <a:r>
+              <a:rPr lang="en-US" sz="1200" dirty="0">
+                <a:solidFill>
+                  <a:srgbClr val="1C2833"/>
+                </a:solidFill>
+                <a:latin typeface="Arial" pitchFamily="34" charset="0"/>
+                <a:ea typeface="Arial" pitchFamily="34" charset="-122"/>
+                <a:cs typeface="Arial" pitchFamily="34" charset="-120"/>
+              </a:rPr>
+              <a:t>) per pair.</a:t>
+            </a:r>
+            <a:endParaRPr lang="en-US" sz="1200" dirty="0"/>
+          </a:p>
+          <a:p>
+            <a:pPr algn="l" marL="342900" indent="-342900">
+              <a:lnSpc>
+                <a:spcPts val="1620"/>
+              </a:lnSpc>
+              <a:spcAft>
+                <a:spcPts val="300"/>
+              </a:spcAft>
+              <a:buSzPct val="100000"/>
+              <a:buChar char="•"/>
+            </a:pPr>
+            <a:r>
+              <a:rPr lang="en-US" sz="1200" dirty="0">
+                <a:solidFill>
+                  <a:srgbClr val="1C2833"/>
+                </a:solidFill>
+                <a:latin typeface="Arial" pitchFamily="34" charset="0"/>
+                <a:ea typeface="Arial" pitchFamily="34" charset="-122"/>
+                <a:cs typeface="Arial" pitchFamily="34" charset="-120"/>
+              </a:rPr>
+              <a:t>Reflection slip per student.</a:t>
+            </a:r>
+            <a:endParaRPr lang="en-US" sz="1200" dirty="0"/>
+          </a:p>
+        </p:txBody>
+      </p:sp>
+      <p:sp>
+        <p:nvSpPr>
+          <p:cNvPr id="5" name="Text 3"/>
           <p:cNvSpPr/>
           <p:nvPr/>
         </p:nvSpPr>
@@ -3522,7 +3869,7 @@
                 <a:ea typeface="Georgia" pitchFamily="34" charset="-122"/>
                 <a:cs typeface="Georgia" pitchFamily="34" charset="-120"/>
               </a:rPr>
-              <a:t>Warm-up (2 min)</a:t>
+              <a:t>Lesson flow</a:t>
             </a:r>
             <a:endParaRPr lang="en-US" sz="1800" dirty="0"/>
           </a:p>
@@ -3531,52 +3878,6 @@
       <p:sp>
         <p:nvSpPr>
           <p:cNvPr id="4" name="Text 2"/>
-          <p:cNvSpPr/>
-          <p:nvPr/>
-        </p:nvSpPr>
-        <p:spPr>
-          <a:xfrm>
-            <a:off x="634901" y="883593"/>
-            <a:ext cx="8102798" cy="281880"/>
-          </a:xfrm>
-          <a:prstGeom prst="rect">
-            <a:avLst/>
-          </a:prstGeom>
-          <a:noFill/>
-          <a:ln/>
-        </p:spPr>
-        <p:txBody>
-          <a:bodyPr wrap="square" lIns="0" tIns="0" rIns="0" bIns="0" rtlCol="0" anchor="t"/>
-          <a:lstStyle/>
-          <a:p>
-            <a:pPr algn="l" marL="342900" indent="-342900">
-              <a:lnSpc>
-                <a:spcPts val="1620"/>
-              </a:lnSpc>
-              <a:spcAft>
-                <a:spcPts val="300"/>
-              </a:spcAft>
-              <a:buSzPct val="100000"/>
-              <a:buChar char="•"/>
-            </a:pPr>
-            <a:r>
-              <a:rPr lang="en-US" sz="1200" i="1" dirty="0">
-                <a:solidFill>
-                  <a:srgbClr val="1C2833"/>
-                </a:solidFill>
-                <a:latin typeface="Arial" pitchFamily="34" charset="0"/>
-                <a:ea typeface="Arial" pitchFamily="34" charset="-122"/>
-                <a:cs typeface="Arial" pitchFamily="34" charset="-120"/>
-              </a:rPr>
-              <a:t>"Quiz first (15 min), then presentations."</a:t>
-            </a:r>
-            <a:endParaRPr lang="en-US" sz="1200" dirty="0"/>
-          </a:p>
-        </p:txBody>
-      </p:sp>
-      <p:sp>
-        <p:nvSpPr>
-          <p:cNvPr id="5" name="Text 3"/>
           <p:cNvSpPr/>
           <p:nvPr/>
         </p:nvSpPr>
@@ -3726,7 +4027,7 @@
                 <a:ea typeface="Georgia" pitchFamily="34" charset="-122"/>
                 <a:cs typeface="Georgia" pitchFamily="34" charset="-120"/>
               </a:rPr>
-              <a:t>Part 1: Summative Quiz (15 min)</a:t>
+              <a:t>Warm-up (2 min)</a:t>
             </a:r>
             <a:endParaRPr lang="en-US" sz="1800" dirty="0"/>
           </a:p>
@@ -3740,8 +4041,8 @@
         </p:nvSpPr>
         <p:spPr>
           <a:xfrm>
-            <a:off x="406301" y="870942"/>
-            <a:ext cx="8498026" cy="436066"/>
+            <a:off x="634901" y="883593"/>
+            <a:ext cx="8102798" cy="281880"/>
           </a:xfrm>
           <a:prstGeom prst="rect">
             <a:avLst/>
@@ -3753,20 +4054,18 @@
           <a:bodyPr wrap="square" lIns="0" tIns="0" rIns="0" bIns="0" rtlCol="0" anchor="t"/>
           <a:lstStyle/>
           <a:p>
-            <a:pPr algn="l" indent="0" marL="0">
-              <a:lnSpc>
-                <a:spcPts val="1680"/>
-              </a:lnSpc>
-              <a:spcBef>
-                <a:spcPts val="300"/>
-              </a:spcBef>
-              <a:spcAft>
-                <a:spcPts val="300"/>
-              </a:spcAft>
-              <a:buNone/>
-            </a:pPr>
-            <a:r>
-              <a:rPr lang="en-US" sz="1200" dirty="0">
+            <a:pPr algn="l" marL="342900" indent="-342900">
+              <a:lnSpc>
+                <a:spcPts val="1620"/>
+              </a:lnSpc>
+              <a:spcAft>
+                <a:spcPts val="300"/>
+              </a:spcAft>
+              <a:buSzPct val="100000"/>
+              <a:buChar char="•"/>
+            </a:pPr>
+            <a:r>
+              <a:rPr lang="en-US" sz="1200" i="1" dirty="0">
                 <a:solidFill>
                   <a:srgbClr val="1C2833"/>
                 </a:solidFill>
@@ -3774,99 +4073,7 @@
                 <a:ea typeface="Arial" pitchFamily="34" charset="-122"/>
                 <a:cs typeface="Arial" pitchFamily="34" charset="-120"/>
               </a:rPr>
-              <a:t>– Distribute </a:t>
-            </a:r>
-            <a:pPr algn="l" indent="0" marL="0">
-              <a:lnSpc>
-                <a:spcPts val="1680"/>
-              </a:lnSpc>
-              <a:spcBef>
-                <a:spcPts val="300"/>
-              </a:spcBef>
-              <a:spcAft>
-                <a:spcPts val="300"/>
-              </a:spcAft>
-              <a:buNone/>
-            </a:pPr>
-            <a:r>
-              <a:rPr lang="en-US" sz="1200" dirty="0">
-                <a:solidFill>
-                  <a:srgbClr val="1C2833"/>
-                </a:solidFill>
-                <a:latin typeface="Arial" pitchFamily="34" charset="0"/>
-                <a:ea typeface="Arial" pitchFamily="34" charset="-122"/>
-                <a:cs typeface="Arial" pitchFamily="34" charset="-120"/>
-              </a:rPr>
-              <a:t>quizzes/summative.md</a:t>
-            </a:r>
-            <a:pPr algn="l" indent="0" marL="0">
-              <a:lnSpc>
-                <a:spcPts val="1680"/>
-              </a:lnSpc>
-              <a:spcBef>
-                <a:spcPts val="300"/>
-              </a:spcBef>
-              <a:spcAft>
-                <a:spcPts val="300"/>
-              </a:spcAft>
-              <a:buNone/>
-            </a:pPr>
-            <a:r>
-              <a:rPr lang="en-US" sz="1200" dirty="0">
-                <a:solidFill>
-                  <a:srgbClr val="1C2833"/>
-                </a:solidFill>
-                <a:latin typeface="Arial" pitchFamily="34" charset="0"/>
-                <a:ea typeface="Arial" pitchFamily="34" charset="-122"/>
-                <a:cs typeface="Arial" pitchFamily="34" charset="-120"/>
-              </a:rPr>
-              <a:t>. Closed notebook. – Covers: 2-digit × 11 (with and without carry), 3-digit × 11, </a:t>
-            </a:r>
-            <a:pPr algn="l" indent="0" marL="0">
-              <a:lnSpc>
-                <a:spcPts val="1680"/>
-              </a:lnSpc>
-              <a:spcBef>
-                <a:spcPts val="300"/>
-              </a:spcBef>
-              <a:spcAft>
-                <a:spcPts val="300"/>
-              </a:spcAft>
-              <a:buNone/>
-            </a:pPr>
-            <a:r>
-              <a:rPr lang="en-US" sz="1200" i="1" dirty="0">
-                <a:solidFill>
-                  <a:srgbClr val="1C2833"/>
-                </a:solidFill>
-                <a:latin typeface="Arial" pitchFamily="34" charset="0"/>
-                <a:ea typeface="Arial" pitchFamily="34" charset="-122"/>
-                <a:cs typeface="Arial" pitchFamily="34" charset="-120"/>
-              </a:rPr>
-              <a:t>Anurūpyeṇa</a:t>
-            </a:r>
-            <a:pPr algn="l" indent="0" marL="0">
-              <a:lnSpc>
-                <a:spcPts val="1680"/>
-              </a:lnSpc>
-              <a:spcBef>
-                <a:spcPts val="300"/>
-              </a:spcBef>
-              <a:spcAft>
-                <a:spcPts val="300"/>
-              </a:spcAft>
-              <a:buNone/>
-            </a:pPr>
-            <a:r>
-              <a:rPr lang="en-US" sz="1200" dirty="0">
-                <a:solidFill>
-                  <a:srgbClr val="1C2833"/>
-                </a:solidFill>
-                <a:latin typeface="Arial" pitchFamily="34" charset="0"/>
-                <a:ea typeface="Arial" pitchFamily="34" charset="-122"/>
-                <a:cs typeface="Arial" pitchFamily="34" charset="-120"/>
-              </a:rPr>
-              <a:t> extension, the algebraic identity, the historicity question (1 short-answer). – Collect at 15-min mark.</a:t>
+              <a:t>"Quiz first (15 min), then presentations."</a:t>
             </a:r>
             <a:endParaRPr lang="en-US" sz="1200" dirty="0"/>
           </a:p>
@@ -4024,7 +4231,7 @@
                 <a:ea typeface="Georgia" pitchFamily="34" charset="-122"/>
                 <a:cs typeface="Georgia" pitchFamily="34" charset="-120"/>
               </a:rPr>
-              <a:t>Part 2: Project Presentations (25 min)</a:t>
+              <a:t>Part 1: Summative Quiz (15 min)</a:t>
             </a:r>
             <a:endParaRPr lang="en-US" sz="1800" dirty="0"/>
           </a:p>
@@ -4038,8 +4245,8 @@
         </p:nvSpPr>
         <p:spPr>
           <a:xfrm>
-            <a:off x="406301" y="870942"/>
-            <a:ext cx="8498026" cy="213271"/>
+            <a:off x="634901" y="883593"/>
+            <a:ext cx="8102798" cy="994172"/>
           </a:xfrm>
           <a:prstGeom prst="rect">
             <a:avLst/>
@@ -4051,17 +4258,15 @@
           <a:bodyPr wrap="square" lIns="0" tIns="0" rIns="0" bIns="0" rtlCol="0" anchor="t"/>
           <a:lstStyle/>
           <a:p>
-            <a:pPr algn="l" indent="0" marL="0">
-              <a:lnSpc>
-                <a:spcPts val="1680"/>
-              </a:lnSpc>
-              <a:spcBef>
-                <a:spcPts val="300"/>
-              </a:spcBef>
-              <a:spcAft>
-                <a:spcPts val="300"/>
-              </a:spcAft>
-              <a:buNone/>
+            <a:pPr algn="l" marL="342900" indent="-342900">
+              <a:lnSpc>
+                <a:spcPts val="1620"/>
+              </a:lnSpc>
+              <a:spcAft>
+                <a:spcPts val="300"/>
+              </a:spcAft>
+              <a:buSzPct val="100000"/>
+              <a:buChar char="•"/>
             </a:pPr>
             <a:r>
               <a:rPr lang="en-US" sz="1200" dirty="0">
@@ -4072,42 +4277,16 @@
                 <a:ea typeface="Arial" pitchFamily="34" charset="-122"/>
                 <a:cs typeface="Arial" pitchFamily="34" charset="-120"/>
               </a:rPr>
-              <a:t>– 2-min presentation + 1-min Q&amp;A per pair (3 min total per pair).</a:t>
-            </a:r>
-            <a:endParaRPr lang="en-US" sz="1200" dirty="0"/>
-          </a:p>
-        </p:txBody>
-      </p:sp>
-      <p:sp>
-        <p:nvSpPr>
-          <p:cNvPr id="5" name="Text 3"/>
-          <p:cNvSpPr/>
-          <p:nvPr/>
-        </p:nvSpPr>
-        <p:spPr>
-          <a:xfrm>
-            <a:off x="634901" y="1173063"/>
-            <a:ext cx="8102798" cy="281880"/>
-          </a:xfrm>
-          <a:prstGeom prst="rect">
-            <a:avLst/>
-          </a:prstGeom>
-          <a:noFill/>
-          <a:ln/>
-        </p:spPr>
-        <p:txBody>
-          <a:bodyPr wrap="square" lIns="0" tIns="0" rIns="0" bIns="0" rtlCol="0" anchor="t"/>
-          <a:lstStyle/>
-          <a:p>
-            <a:pPr algn="l" marL="342900" indent="-342900">
+              <a:t>Distribute </a:t>
+            </a:r>
+            <a:pPr algn="l" indent="0" marL="0">
               <a:lnSpc>
                 <a:spcPts val="1620"/>
               </a:lnSpc>
               <a:spcAft>
                 <a:spcPts val="300"/>
               </a:spcAft>
-              <a:buSzPct val="100000"/>
-              <a:buChar char="•"/>
+              <a:buNone/>
             </a:pPr>
             <a:r>
               <a:rPr lang="en-US" sz="1200" dirty="0">
@@ -4118,40 +4297,12 @@
                 <a:ea typeface="Arial" pitchFamily="34" charset="-122"/>
                 <a:cs typeface="Arial" pitchFamily="34" charset="-120"/>
               </a:rPr>
-              <a:t>~8 pairs fit in 25 min. Reserve next class for remaining pairs if needed.</a:t>
-            </a:r>
-            <a:endParaRPr lang="en-US" sz="1200" dirty="0"/>
-          </a:p>
-        </p:txBody>
-      </p:sp>
-      <p:sp>
-        <p:nvSpPr>
-          <p:cNvPr id="6" name="Text 4"/>
-          <p:cNvSpPr/>
-          <p:nvPr/>
-        </p:nvSpPr>
-        <p:spPr>
-          <a:xfrm>
-            <a:off x="406301" y="1543794"/>
-            <a:ext cx="8498026" cy="426541"/>
-          </a:xfrm>
-          <a:prstGeom prst="rect">
-            <a:avLst/>
-          </a:prstGeom>
-          <a:noFill/>
-          <a:ln/>
-        </p:spPr>
-        <p:txBody>
-          <a:bodyPr wrap="square" lIns="0" tIns="0" rIns="0" bIns="0" rtlCol="0" anchor="t"/>
-          <a:lstStyle/>
-          <a:p>
+              <a:t>quizzes/summative.md</a:t>
+            </a:r>
             <a:pPr algn="l" indent="0" marL="0">
               <a:lnSpc>
-                <a:spcPts val="1680"/>
-              </a:lnSpc>
-              <a:spcBef>
-                <a:spcPts val="300"/>
-              </a:spcBef>
+                <a:spcPts val="1620"/>
+              </a:lnSpc>
               <a:spcAft>
                 <a:spcPts val="300"/>
               </a:spcAft>
@@ -4166,15 +4317,103 @@
                 <a:ea typeface="Arial" pitchFamily="34" charset="-122"/>
                 <a:cs typeface="Arial" pitchFamily="34" charset="-120"/>
               </a:rPr>
-              <a:t>– During each presentation:   – Teacher marks rubric in real-time.   – One assigned audience member asks one question.   – Other audience members fill "I learned / I wonder" slips.</a:t>
+              <a:t>. Closed notebook.</a:t>
             </a:r>
             <a:endParaRPr lang="en-US" sz="1200" dirty="0"/>
           </a:p>
-        </p:txBody>
-      </p:sp>
-      <p:sp>
-        <p:nvSpPr>
-          <p:cNvPr id="7" name="Text 5"/>
+          <a:p>
+            <a:pPr algn="l" marL="342900" indent="-342900">
+              <a:lnSpc>
+                <a:spcPts val="1620"/>
+              </a:lnSpc>
+              <a:spcAft>
+                <a:spcPts val="300"/>
+              </a:spcAft>
+              <a:buSzPct val="100000"/>
+              <a:buChar char="•"/>
+            </a:pPr>
+            <a:r>
+              <a:rPr lang="en-US" sz="1200" dirty="0">
+                <a:solidFill>
+                  <a:srgbClr val="1C2833"/>
+                </a:solidFill>
+                <a:latin typeface="Arial" pitchFamily="34" charset="0"/>
+                <a:ea typeface="Arial" pitchFamily="34" charset="-122"/>
+                <a:cs typeface="Arial" pitchFamily="34" charset="-120"/>
+              </a:rPr>
+              <a:t>Covers: 2-digit × 11 (with and without carry), 3-digit × 11, </a:t>
+            </a:r>
+            <a:pPr algn="l" indent="0" marL="0">
+              <a:lnSpc>
+                <a:spcPts val="1620"/>
+              </a:lnSpc>
+              <a:spcAft>
+                <a:spcPts val="300"/>
+              </a:spcAft>
+              <a:buNone/>
+            </a:pPr>
+            <a:r>
+              <a:rPr lang="en-US" sz="1200" i="1" dirty="0">
+                <a:solidFill>
+                  <a:srgbClr val="1C2833"/>
+                </a:solidFill>
+                <a:latin typeface="Arial" pitchFamily="34" charset="0"/>
+                <a:ea typeface="Arial" pitchFamily="34" charset="-122"/>
+                <a:cs typeface="Arial" pitchFamily="34" charset="-120"/>
+              </a:rPr>
+              <a:t>Anurūpyeṇa</a:t>
+            </a:r>
+            <a:pPr algn="l" indent="0" marL="0">
+              <a:lnSpc>
+                <a:spcPts val="1620"/>
+              </a:lnSpc>
+              <a:spcAft>
+                <a:spcPts val="300"/>
+              </a:spcAft>
+              <a:buNone/>
+            </a:pPr>
+            <a:r>
+              <a:rPr lang="en-US" sz="1200" dirty="0">
+                <a:solidFill>
+                  <a:srgbClr val="1C2833"/>
+                </a:solidFill>
+                <a:latin typeface="Arial" pitchFamily="34" charset="0"/>
+                <a:ea typeface="Arial" pitchFamily="34" charset="-122"/>
+                <a:cs typeface="Arial" pitchFamily="34" charset="-120"/>
+              </a:rPr>
+              <a:t> extension, the algebraic identity, the historicity question (1 short-answer).</a:t>
+            </a:r>
+            <a:endParaRPr lang="en-US" sz="1200" dirty="0"/>
+          </a:p>
+          <a:p>
+            <a:pPr algn="l" marL="342900" indent="-342900">
+              <a:lnSpc>
+                <a:spcPts val="1620"/>
+              </a:lnSpc>
+              <a:spcAft>
+                <a:spcPts val="300"/>
+              </a:spcAft>
+              <a:buSzPct val="100000"/>
+              <a:buChar char="•"/>
+            </a:pPr>
+            <a:r>
+              <a:rPr lang="en-US" sz="1200" dirty="0">
+                <a:solidFill>
+                  <a:srgbClr val="1C2833"/>
+                </a:solidFill>
+                <a:latin typeface="Arial" pitchFamily="34" charset="0"/>
+                <a:ea typeface="Arial" pitchFamily="34" charset="-122"/>
+                <a:cs typeface="Arial" pitchFamily="34" charset="-120"/>
+              </a:rPr>
+              <a:t>Collect at 15-min mark.</a:t>
+            </a:r>
+            <a:endParaRPr lang="en-US" sz="1200" dirty="0"/>
+          </a:p>
+        </p:txBody>
+      </p:sp>
+      <p:sp>
+        <p:nvSpPr>
+          <p:cNvPr id="5" name="Text 3"/>
           <p:cNvSpPr/>
           <p:nvPr/>
         </p:nvSpPr>
@@ -4324,7 +4563,7 @@
                 <a:ea typeface="Georgia" pitchFamily="34" charset="-122"/>
                 <a:cs typeface="Georgia" pitchFamily="34" charset="-120"/>
               </a:rPr>
-              <a:t>Wrap-up (3 min)</a:t>
+              <a:t>Part 2: Project Presentations (25 min)</a:t>
             </a:r>
             <a:endParaRPr lang="en-US" sz="1800" dirty="0"/>
           </a:p>
@@ -4338,8 +4577,8 @@
         </p:nvSpPr>
         <p:spPr>
           <a:xfrm>
-            <a:off x="406301" y="870942"/>
-            <a:ext cx="8498026" cy="436066"/>
+            <a:off x="634901" y="883593"/>
+            <a:ext cx="8102798" cy="1500783"/>
           </a:xfrm>
           <a:prstGeom prst="rect">
             <a:avLst/>
@@ -4351,17 +4590,15 @@
           <a:bodyPr wrap="square" lIns="0" tIns="0" rIns="0" bIns="0" rtlCol="0" anchor="t"/>
           <a:lstStyle/>
           <a:p>
-            <a:pPr algn="l" indent="0" marL="0">
-              <a:lnSpc>
-                <a:spcPts val="1680"/>
-              </a:lnSpc>
-              <a:spcBef>
-                <a:spcPts val="300"/>
-              </a:spcBef>
-              <a:spcAft>
-                <a:spcPts val="300"/>
-              </a:spcAft>
-              <a:buNone/>
+            <a:pPr algn="l" marL="342900" indent="-342900">
+              <a:lnSpc>
+                <a:spcPts val="1620"/>
+              </a:lnSpc>
+              <a:spcAft>
+                <a:spcPts val="300"/>
+              </a:spcAft>
+              <a:buSzPct val="100000"/>
+              <a:buChar char="•"/>
             </a:pPr>
             <a:r>
               <a:rPr lang="en-US" sz="1200" dirty="0">
@@ -4372,22 +4609,23 @@
                 <a:ea typeface="Arial" pitchFamily="34" charset="-122"/>
                 <a:cs typeface="Arial" pitchFamily="34" charset="-120"/>
               </a:rPr>
-              <a:t>– Closing question (oral): </a:t>
-            </a:r>
-            <a:pPr algn="l" indent="0" marL="0">
-              <a:lnSpc>
-                <a:spcPts val="1680"/>
-              </a:lnSpc>
-              <a:spcBef>
-                <a:spcPts val="300"/>
-              </a:spcBef>
-              <a:spcAft>
-                <a:spcPts val="300"/>
-              </a:spcAft>
-              <a:buNone/>
-            </a:pPr>
-            <a:r>
-              <a:rPr lang="en-US" sz="1200" i="1" dirty="0">
+              <a:t>2-min presentation + 1-min Q&amp;A per pair (3 min total per pair).</a:t>
+            </a:r>
+            <a:endParaRPr lang="en-US" sz="1200" dirty="0"/>
+          </a:p>
+          <a:p>
+            <a:pPr algn="l" marL="342900" indent="-342900">
+              <a:lnSpc>
+                <a:spcPts val="1620"/>
+              </a:lnSpc>
+              <a:spcAft>
+                <a:spcPts val="300"/>
+              </a:spcAft>
+              <a:buSzPct val="100000"/>
+              <a:buChar char="•"/>
+            </a:pPr>
+            <a:r>
+              <a:rPr lang="en-US" sz="1200" dirty="0">
                 <a:solidFill>
                   <a:srgbClr val="1C2833"/>
                 </a:solidFill>
@@ -4395,19 +4633,20 @@
                 <a:ea typeface="Arial" pitchFamily="34" charset="-122"/>
                 <a:cs typeface="Arial" pitchFamily="34" charset="-120"/>
               </a:rPr>
-              <a:t>"What's one mental-math habit you'll keep using after this module?"</a:t>
-            </a:r>
-            <a:pPr algn="l" indent="0" marL="0">
-              <a:lnSpc>
-                <a:spcPts val="1680"/>
-              </a:lnSpc>
-              <a:spcBef>
-                <a:spcPts val="300"/>
-              </a:spcBef>
-              <a:spcAft>
-                <a:spcPts val="300"/>
-              </a:spcAft>
-              <a:buNone/>
+              <a:t>~8 pairs fit in 25 min. Reserve next class for remaining pairs if needed.</a:t>
+            </a:r>
+            <a:endParaRPr lang="en-US" sz="1200" dirty="0"/>
+          </a:p>
+          <a:p>
+            <a:pPr algn="l" marL="342900" indent="-342900">
+              <a:lnSpc>
+                <a:spcPts val="1620"/>
+              </a:lnSpc>
+              <a:spcAft>
+                <a:spcPts val="300"/>
+              </a:spcAft>
+              <a:buSzPct val="100000"/>
+              <a:buChar char="•"/>
             </a:pPr>
             <a:r>
               <a:rPr lang="en-US" sz="1200" dirty="0">
@@ -4418,19 +4657,20 @@
                 <a:ea typeface="Arial" pitchFamily="34" charset="-122"/>
                 <a:cs typeface="Arial" pitchFamily="34" charset="-120"/>
               </a:rPr>
-              <a:t> – Reflection slip submitted (reproduced in </a:t>
-            </a:r>
-            <a:pPr algn="l" indent="0" marL="0">
-              <a:lnSpc>
-                <a:spcPts val="1680"/>
-              </a:lnSpc>
-              <a:spcBef>
-                <a:spcPts val="300"/>
-              </a:spcBef>
-              <a:spcAft>
-                <a:spcPts val="300"/>
-              </a:spcAft>
-              <a:buNone/>
+              <a:t>During each presentation:</a:t>
+            </a:r>
+            <a:endParaRPr lang="en-US" sz="1200" dirty="0"/>
+          </a:p>
+          <a:p>
+            <a:pPr algn="l" marL="342900" indent="-342900">
+              <a:lnSpc>
+                <a:spcPts val="1620"/>
+              </a:lnSpc>
+              <a:spcAft>
+                <a:spcPts val="300"/>
+              </a:spcAft>
+              <a:buSzPct val="100000"/>
+              <a:buChar char="•"/>
             </a:pPr>
             <a:r>
               <a:rPr lang="en-US" sz="1200" dirty="0">
@@ -4441,19 +4681,20 @@
                 <a:ea typeface="Arial" pitchFamily="34" charset="-122"/>
                 <a:cs typeface="Arial" pitchFamily="34" charset="-120"/>
               </a:rPr>
-              <a:t>student-workbook.md</a:t>
-            </a:r>
-            <a:pPr algn="l" indent="0" marL="0">
-              <a:lnSpc>
-                <a:spcPts val="1680"/>
-              </a:lnSpc>
-              <a:spcBef>
-                <a:spcPts val="300"/>
-              </a:spcBef>
-              <a:spcAft>
-                <a:spcPts val="300"/>
-              </a:spcAft>
-              <a:buNone/>
+              <a:t>Teacher marks rubric in real-time.</a:t>
+            </a:r>
+            <a:endParaRPr lang="en-US" sz="1200" dirty="0"/>
+          </a:p>
+          <a:p>
+            <a:pPr algn="l" marL="342900" indent="-342900">
+              <a:lnSpc>
+                <a:spcPts val="1620"/>
+              </a:lnSpc>
+              <a:spcAft>
+                <a:spcPts val="300"/>
+              </a:spcAft>
+              <a:buSzPct val="100000"/>
+              <a:buChar char="•"/>
             </a:pPr>
             <a:r>
               <a:rPr lang="en-US" sz="1200" dirty="0">
@@ -4464,7 +4705,31 @@
                 <a:ea typeface="Arial" pitchFamily="34" charset="-122"/>
                 <a:cs typeface="Arial" pitchFamily="34" charset="-120"/>
               </a:rPr>
-              <a:t>).</a:t>
+              <a:t>One assigned audience member asks one question.</a:t>
+            </a:r>
+            <a:endParaRPr lang="en-US" sz="1200" dirty="0"/>
+          </a:p>
+          <a:p>
+            <a:pPr algn="l" marL="342900" indent="-342900">
+              <a:lnSpc>
+                <a:spcPts val="1620"/>
+              </a:lnSpc>
+              <a:spcAft>
+                <a:spcPts val="300"/>
+              </a:spcAft>
+              <a:buSzPct val="100000"/>
+              <a:buChar char="•"/>
+            </a:pPr>
+            <a:r>
+              <a:rPr lang="en-US" sz="1200" dirty="0">
+                <a:solidFill>
+                  <a:srgbClr val="1C2833"/>
+                </a:solidFill>
+                <a:latin typeface="Arial" pitchFamily="34" charset="0"/>
+                <a:ea typeface="Arial" pitchFamily="34" charset="-122"/>
+                <a:cs typeface="Arial" pitchFamily="34" charset="-120"/>
+              </a:rPr>
+              <a:t>Other audience members fill "I learned / I wonder" slips.</a:t>
             </a:r>
             <a:endParaRPr lang="en-US" sz="1200" dirty="0"/>
           </a:p>
@@ -4622,7 +4887,7 @@
                 <a:ea typeface="Georgia" pitchFamily="34" charset="-122"/>
                 <a:cs typeface="Georgia" pitchFamily="34" charset="-120"/>
               </a:rPr>
-              <a:t>Student-facing content</a:t>
+              <a:t>Wrap-up (3 min)</a:t>
             </a:r>
             <a:endParaRPr lang="en-US" sz="1800" dirty="0"/>
           </a:p>
@@ -4636,61 +4901,8 @@
         </p:nvSpPr>
         <p:spPr>
           <a:xfrm>
-            <a:off x="406301" y="883593"/>
-            <a:ext cx="8331398" cy="1881187"/>
-          </a:xfrm>
-          <a:prstGeom prst="rect">
-            <a:avLst/>
-          </a:prstGeom>
-          <a:solidFill>
-            <a:srgbClr val="F4F8F9"/>
-          </a:solidFill>
-          <a:ln/>
-        </p:spPr>
-        <p:txBody>
-          <a:bodyPr wrap="square" rtlCol="0" anchor="ctr"/>
-          <a:lstStyle/>
-          <a:p>
-            <a:pPr indent="0" marL="0">
-              <a:buNone/>
-            </a:pPr>
-            <a:endParaRPr lang="en-US" dirty="0"/>
-          </a:p>
-        </p:txBody>
-      </p:sp>
-      <p:sp>
-        <p:nvSpPr>
-          <p:cNvPr id="5" name="Shape 3"/>
-          <p:cNvSpPr/>
-          <p:nvPr/>
-        </p:nvSpPr>
-        <p:spPr>
-          <a:xfrm>
-            <a:off x="434876" y="883593"/>
-            <a:ext cx="0" cy="1881187"/>
-          </a:xfrm>
-          <a:prstGeom prst="line">
-            <a:avLst/>
-          </a:prstGeom>
-          <a:noFill/>
-          <a:ln w="57150">
-            <a:solidFill>
-              <a:srgbClr val="FE4447"/>
-            </a:solidFill>
-            <a:prstDash val="solid"/>
-          </a:ln>
-        </p:spPr>
-      </p:sp>
-      <p:sp>
-        <p:nvSpPr>
-          <p:cNvPr id="6" name="Text 4"/>
-          <p:cNvSpPr/>
-          <p:nvPr/>
-        </p:nvSpPr>
-        <p:spPr>
-          <a:xfrm>
-            <a:off x="692051" y="1074093"/>
-            <a:ext cx="7973389" cy="230981"/>
+            <a:off x="634901" y="883593"/>
+            <a:ext cx="8102798" cy="544711"/>
           </a:xfrm>
           <a:prstGeom prst="rect">
             <a:avLst/>
@@ -4702,203 +4914,118 @@
           <a:bodyPr wrap="square" lIns="0" tIns="0" rIns="0" bIns="0" rtlCol="0" anchor="t"/>
           <a:lstStyle/>
           <a:p>
+            <a:pPr algn="l" marL="342900" indent="-342900">
+              <a:lnSpc>
+                <a:spcPts val="1620"/>
+              </a:lnSpc>
+              <a:spcAft>
+                <a:spcPts val="300"/>
+              </a:spcAft>
+              <a:buSzPct val="100000"/>
+              <a:buChar char="•"/>
+            </a:pPr>
+            <a:r>
+              <a:rPr lang="en-US" sz="1200" dirty="0">
+                <a:solidFill>
+                  <a:srgbClr val="1C2833"/>
+                </a:solidFill>
+                <a:latin typeface="Arial" pitchFamily="34" charset="0"/>
+                <a:ea typeface="Arial" pitchFamily="34" charset="-122"/>
+                <a:cs typeface="Arial" pitchFamily="34" charset="-120"/>
+              </a:rPr>
+              <a:t>Closing question (oral): </a:t>
+            </a:r>
             <a:pPr algn="l" indent="0" marL="0">
               <a:lnSpc>
-                <a:spcPts val="1820"/>
-              </a:lnSpc>
-              <a:spcBef>
-                <a:spcPts val="300"/>
-              </a:spcBef>
-              <a:spcAft>
-                <a:spcPts val="300"/>
-              </a:spcAft>
-              <a:buNone/>
-            </a:pPr>
-            <a:r>
-              <a:rPr lang="en-US" sz="1300" b="1" i="1" dirty="0">
-                <a:solidFill>
-                  <a:srgbClr val="1C2833"/>
-                </a:solidFill>
-                <a:latin typeface="Georgia" pitchFamily="34" charset="0"/>
-                <a:ea typeface="Georgia" pitchFamily="34" charset="-122"/>
-                <a:cs typeface="Georgia" pitchFamily="34" charset="-120"/>
-              </a:rPr>
-              <a:t>Today: quiz + presentations</a:t>
-            </a:r>
-            <a:endParaRPr lang="en-US" sz="1300" dirty="0"/>
-          </a:p>
-        </p:txBody>
-      </p:sp>
-      <p:sp>
-        <p:nvSpPr>
-          <p:cNvPr id="7" name="Text 5"/>
-          <p:cNvSpPr/>
-          <p:nvPr/>
-        </p:nvSpPr>
-        <p:spPr>
-          <a:xfrm>
-            <a:off x="692051" y="1343174"/>
-            <a:ext cx="7973389" cy="230981"/>
-          </a:xfrm>
-          <a:prstGeom prst="rect">
-            <a:avLst/>
-          </a:prstGeom>
-          <a:noFill/>
-          <a:ln/>
-        </p:spPr>
-        <p:txBody>
-          <a:bodyPr wrap="square" lIns="0" tIns="0" rIns="0" bIns="0" rtlCol="0" anchor="t"/>
-          <a:lstStyle/>
-          <a:p>
+                <a:spcPts val="1620"/>
+              </a:lnSpc>
+              <a:spcAft>
+                <a:spcPts val="300"/>
+              </a:spcAft>
+              <a:buNone/>
+            </a:pPr>
+            <a:r>
+              <a:rPr lang="en-US" sz="1200" i="1" dirty="0">
+                <a:solidFill>
+                  <a:srgbClr val="1C2833"/>
+                </a:solidFill>
+                <a:latin typeface="Arial" pitchFamily="34" charset="0"/>
+                <a:ea typeface="Arial" pitchFamily="34" charset="-122"/>
+                <a:cs typeface="Arial" pitchFamily="34" charset="-120"/>
+              </a:rPr>
+              <a:t>"What's one mental-math habit you'll keep using after this module?"</a:t>
+            </a:r>
+            <a:endParaRPr lang="en-US" sz="1200" dirty="0"/>
+          </a:p>
+          <a:p>
+            <a:pPr algn="l" marL="342900" indent="-342900">
+              <a:lnSpc>
+                <a:spcPts val="1620"/>
+              </a:lnSpc>
+              <a:spcAft>
+                <a:spcPts val="300"/>
+              </a:spcAft>
+              <a:buSzPct val="100000"/>
+              <a:buChar char="•"/>
+            </a:pPr>
+            <a:r>
+              <a:rPr lang="en-US" sz="1200" dirty="0">
+                <a:solidFill>
+                  <a:srgbClr val="1C2833"/>
+                </a:solidFill>
+                <a:latin typeface="Arial" pitchFamily="34" charset="0"/>
+                <a:ea typeface="Arial" pitchFamily="34" charset="-122"/>
+                <a:cs typeface="Arial" pitchFamily="34" charset="-120"/>
+              </a:rPr>
+              <a:t>Reflection slip submitted (reproduced in </a:t>
+            </a:r>
             <a:pPr algn="l" indent="0" marL="0">
               <a:lnSpc>
-                <a:spcPts val="1820"/>
-              </a:lnSpc>
-              <a:spcBef>
-                <a:spcPts val="300"/>
-              </a:spcBef>
-              <a:spcAft>
-                <a:spcPts val="300"/>
-              </a:spcAft>
-              <a:buNone/>
-            </a:pPr>
-            <a:r>
-              <a:rPr lang="en-US" sz="1300" i="1" dirty="0">
-                <a:solidFill>
-                  <a:srgbClr val="1C2833"/>
-                </a:solidFill>
-                <a:latin typeface="Georgia" pitchFamily="34" charset="0"/>
-                <a:ea typeface="Georgia" pitchFamily="34" charset="-122"/>
-                <a:cs typeface="Georgia" pitchFamily="34" charset="-120"/>
-              </a:rPr>
-              <a:t>15 min for the summative quiz (closed book).</a:t>
-            </a:r>
-            <a:endParaRPr lang="en-US" sz="1300" dirty="0"/>
-          </a:p>
-        </p:txBody>
-      </p:sp>
-      <p:sp>
-        <p:nvSpPr>
-          <p:cNvPr id="8" name="Text 6"/>
-          <p:cNvSpPr/>
-          <p:nvPr/>
-        </p:nvSpPr>
-        <p:spPr>
-          <a:xfrm>
-            <a:off x="692051" y="1612255"/>
-            <a:ext cx="7973389" cy="230981"/>
-          </a:xfrm>
-          <a:prstGeom prst="rect">
-            <a:avLst/>
-          </a:prstGeom>
-          <a:noFill/>
-          <a:ln/>
-        </p:spPr>
-        <p:txBody>
-          <a:bodyPr wrap="square" lIns="0" tIns="0" rIns="0" bIns="0" rtlCol="0" anchor="t"/>
-          <a:lstStyle/>
-          <a:p>
+                <a:spcPts val="1620"/>
+              </a:lnSpc>
+              <a:spcAft>
+                <a:spcPts val="300"/>
+              </a:spcAft>
+              <a:buNone/>
+            </a:pPr>
+            <a:r>
+              <a:rPr lang="en-US" sz="1200" dirty="0">
+                <a:solidFill>
+                  <a:srgbClr val="1C2833"/>
+                </a:solidFill>
+                <a:latin typeface="Arial" pitchFamily="34" charset="0"/>
+                <a:ea typeface="Arial" pitchFamily="34" charset="-122"/>
+                <a:cs typeface="Arial" pitchFamily="34" charset="-120"/>
+              </a:rPr>
+              <a:t>student-workbook.md</a:t>
+            </a:r>
             <a:pPr algn="l" indent="0" marL="0">
               <a:lnSpc>
-                <a:spcPts val="1820"/>
-              </a:lnSpc>
-              <a:spcBef>
-                <a:spcPts val="300"/>
-              </a:spcBef>
-              <a:spcAft>
-                <a:spcPts val="300"/>
-              </a:spcAft>
-              <a:buNone/>
-            </a:pPr>
-            <a:r>
-              <a:rPr lang="en-US" sz="1300" i="1" dirty="0">
-                <a:solidFill>
-                  <a:srgbClr val="1C2833"/>
-                </a:solidFill>
-                <a:latin typeface="Georgia" pitchFamily="34" charset="0"/>
-                <a:ea typeface="Georgia" pitchFamily="34" charset="-122"/>
-                <a:cs typeface="Georgia" pitchFamily="34" charset="-120"/>
-              </a:rPr>
-              <a:t>2-minute presentation per pair, then 1-min audience question.</a:t>
-            </a:r>
-            <a:endParaRPr lang="en-US" sz="1300" dirty="0"/>
-          </a:p>
-        </p:txBody>
-      </p:sp>
-      <p:sp>
-        <p:nvSpPr>
-          <p:cNvPr id="9" name="Text 7"/>
-          <p:cNvSpPr/>
-          <p:nvPr/>
-        </p:nvSpPr>
-        <p:spPr>
-          <a:xfrm>
-            <a:off x="692051" y="1881336"/>
-            <a:ext cx="7973389" cy="692944"/>
-          </a:xfrm>
-          <a:prstGeom prst="rect">
-            <a:avLst/>
-          </a:prstGeom>
-          <a:noFill/>
-          <a:ln/>
-        </p:spPr>
-        <p:txBody>
-          <a:bodyPr wrap="square" lIns="0" tIns="0" rIns="0" bIns="0" rtlCol="0" anchor="t"/>
-          <a:lstStyle/>
-          <a:p>
-            <a:pPr algn="l" indent="0" marL="0">
-              <a:lnSpc>
-                <a:spcPts val="1820"/>
-              </a:lnSpc>
-              <a:spcBef>
-                <a:spcPts val="300"/>
-              </a:spcBef>
-              <a:spcAft>
-                <a:spcPts val="300"/>
-              </a:spcAft>
-              <a:buNone/>
-            </a:pPr>
-            <a:r>
-              <a:rPr lang="en-US" sz="1300" b="1" i="1" dirty="0">
-                <a:solidFill>
-                  <a:srgbClr val="1C2833"/>
-                </a:solidFill>
-                <a:latin typeface="Georgia" pitchFamily="34" charset="0"/>
-                <a:ea typeface="Georgia" pitchFamily="34" charset="-122"/>
-                <a:cs typeface="Georgia" pitchFamily="34" charset="-120"/>
-              </a:rPr>
-              <a:t>Reflection (due at end of class):</a:t>
-            </a:r>
-            <a:pPr algn="l" indent="0" marL="0">
-              <a:lnSpc>
-                <a:spcPts val="1820"/>
-              </a:lnSpc>
-              <a:spcBef>
-                <a:spcPts val="300"/>
-              </a:spcBef>
-              <a:spcAft>
-                <a:spcPts val="300"/>
-              </a:spcAft>
-              <a:buNone/>
-            </a:pPr>
-            <a:r>
-              <a:rPr lang="en-US" sz="1300" dirty="0">
-                <a:solidFill>
-                  <a:srgbClr val="1C2833"/>
-                </a:solidFill>
-                <a:latin typeface="Georgia" pitchFamily="34" charset="0"/>
-                <a:ea typeface="Georgia" pitchFamily="34" charset="-122"/>
-                <a:cs typeface="Georgia" pitchFamily="34" charset="-120"/>
-              </a:rPr>
-              <a:t> 1. What was the most surprising thing you learned about ×11? 2. Did your view of "Vedic mathematics" change during this module? How? 3. If you had three more days, what would you do differently?</a:t>
-            </a:r>
-            <a:endParaRPr lang="en-US" sz="1300" dirty="0"/>
-          </a:p>
-        </p:txBody>
-      </p:sp>
-      <p:sp>
-        <p:nvSpPr>
-          <p:cNvPr id="10" name="Text 8"/>
+                <a:spcPts val="1620"/>
+              </a:lnSpc>
+              <a:spcAft>
+                <a:spcPts val="300"/>
+              </a:spcAft>
+              <a:buNone/>
+            </a:pPr>
+            <a:r>
+              <a:rPr lang="en-US" sz="1200" dirty="0">
+                <a:solidFill>
+                  <a:srgbClr val="1C2833"/>
+                </a:solidFill>
+                <a:latin typeface="Arial" pitchFamily="34" charset="0"/>
+                <a:ea typeface="Arial" pitchFamily="34" charset="-122"/>
+                <a:cs typeface="Arial" pitchFamily="34" charset="-120"/>
+              </a:rPr>
+              <a:t>).</a:t>
+            </a:r>
+            <a:endParaRPr lang="en-US" sz="1200" dirty="0"/>
+          </a:p>
+        </p:txBody>
+      </p:sp>
+      <p:sp>
+        <p:nvSpPr>
+          <p:cNvPr id="5" name="Text 3"/>
           <p:cNvSpPr/>
           <p:nvPr/>
         </p:nvSpPr>
@@ -5048,7 +5175,7 @@
                 <a:ea typeface="Georgia" pitchFamily="34" charset="-122"/>
                 <a:cs typeface="Georgia" pitchFamily="34" charset="-120"/>
               </a:rPr>
-              <a:t>Homework</a:t>
+              <a:t>Student-facing content</a:t>
             </a:r>
             <a:endParaRPr lang="en-US" sz="1800" dirty="0"/>
           </a:p>
@@ -5062,8 +5189,61 @@
         </p:nvSpPr>
         <p:spPr>
           <a:xfrm>
-            <a:off x="406301" y="870942"/>
-            <a:ext cx="8498026" cy="213271"/>
+            <a:off x="406301" y="883593"/>
+            <a:ext cx="8331398" cy="2226469"/>
+          </a:xfrm>
+          <a:prstGeom prst="rect">
+            <a:avLst/>
+          </a:prstGeom>
+          <a:solidFill>
+            <a:srgbClr val="F4F8F9"/>
+          </a:solidFill>
+          <a:ln/>
+        </p:spPr>
+        <p:txBody>
+          <a:bodyPr wrap="square" rtlCol="0" anchor="ctr"/>
+          <a:lstStyle/>
+          <a:p>
+            <a:pPr indent="0" marL="0">
+              <a:buNone/>
+            </a:pPr>
+            <a:endParaRPr lang="en-US" dirty="0"/>
+          </a:p>
+        </p:txBody>
+      </p:sp>
+      <p:sp>
+        <p:nvSpPr>
+          <p:cNvPr id="5" name="Shape 3"/>
+          <p:cNvSpPr/>
+          <p:nvPr/>
+        </p:nvSpPr>
+        <p:spPr>
+          <a:xfrm>
+            <a:off x="434876" y="883593"/>
+            <a:ext cx="0" cy="2226469"/>
+          </a:xfrm>
+          <a:prstGeom prst="line">
+            <a:avLst/>
+          </a:prstGeom>
+          <a:noFill/>
+          <a:ln w="57150">
+            <a:solidFill>
+              <a:srgbClr val="FE4447"/>
+            </a:solidFill>
+            <a:prstDash val="solid"/>
+          </a:ln>
+        </p:spPr>
+      </p:sp>
+      <p:sp>
+        <p:nvSpPr>
+          <p:cNvPr id="6" name="Text 4"/>
+          <p:cNvSpPr/>
+          <p:nvPr/>
+        </p:nvSpPr>
+        <p:spPr>
+          <a:xfrm>
+            <a:off x="692051" y="1074093"/>
+            <a:ext cx="7973389" cy="230981"/>
           </a:xfrm>
           <a:prstGeom prst="rect">
             <a:avLst/>
@@ -5077,7 +5257,7 @@
           <a:p>
             <a:pPr algn="l" indent="0" marL="0">
               <a:lnSpc>
-                <a:spcPts val="1680"/>
+                <a:spcPts val="1820"/>
               </a:lnSpc>
               <a:spcBef>
                 <a:spcPts val="300"/>
@@ -5088,23 +5268,311 @@
               <a:buNone/>
             </a:pPr>
             <a:r>
-              <a:rPr lang="en-US" sz="1200" dirty="0">
-                <a:solidFill>
-                  <a:srgbClr val="1C2833"/>
-                </a:solidFill>
-                <a:latin typeface="Arial" pitchFamily="34" charset="0"/>
-                <a:ea typeface="Arial" pitchFamily="34" charset="-122"/>
-                <a:cs typeface="Arial" pitchFamily="34" charset="-120"/>
-              </a:rPr>
-              <a:t>– None. Module is complete.</a:t>
-            </a:r>
-            <a:endParaRPr lang="en-US" sz="1200" dirty="0"/>
-          </a:p>
-        </p:txBody>
-      </p:sp>
-      <p:sp>
-        <p:nvSpPr>
-          <p:cNvPr id="5" name="Text 3"/>
+              <a:rPr lang="en-US" sz="1300" b="1" i="1" dirty="0">
+                <a:solidFill>
+                  <a:srgbClr val="1C2833"/>
+                </a:solidFill>
+                <a:latin typeface="Georgia" pitchFamily="34" charset="0"/>
+                <a:ea typeface="Georgia" pitchFamily="34" charset="-122"/>
+                <a:cs typeface="Georgia" pitchFamily="34" charset="-120"/>
+              </a:rPr>
+              <a:t>Today: quiz + presentations</a:t>
+            </a:r>
+            <a:endParaRPr lang="en-US" sz="1300" dirty="0"/>
+          </a:p>
+        </p:txBody>
+      </p:sp>
+      <p:sp>
+        <p:nvSpPr>
+          <p:cNvPr id="7" name="Text 5"/>
+          <p:cNvSpPr/>
+          <p:nvPr/>
+        </p:nvSpPr>
+        <p:spPr>
+          <a:xfrm>
+            <a:off x="692051" y="1343174"/>
+            <a:ext cx="7973389" cy="230981"/>
+          </a:xfrm>
+          <a:prstGeom prst="rect">
+            <a:avLst/>
+          </a:prstGeom>
+          <a:noFill/>
+          <a:ln/>
+        </p:spPr>
+        <p:txBody>
+          <a:bodyPr wrap="square" lIns="0" tIns="0" rIns="0" bIns="0" rtlCol="0" anchor="t"/>
+          <a:lstStyle/>
+          <a:p>
+            <a:pPr algn="l" indent="0" marL="0">
+              <a:lnSpc>
+                <a:spcPts val="1820"/>
+              </a:lnSpc>
+              <a:spcBef>
+                <a:spcPts val="300"/>
+              </a:spcBef>
+              <a:spcAft>
+                <a:spcPts val="300"/>
+              </a:spcAft>
+              <a:buNone/>
+            </a:pPr>
+            <a:r>
+              <a:rPr lang="en-US" sz="1300" i="1" dirty="0">
+                <a:solidFill>
+                  <a:srgbClr val="1C2833"/>
+                </a:solidFill>
+                <a:latin typeface="Georgia" pitchFamily="34" charset="0"/>
+                <a:ea typeface="Georgia" pitchFamily="34" charset="-122"/>
+                <a:cs typeface="Georgia" pitchFamily="34" charset="-120"/>
+              </a:rPr>
+              <a:t>15 min for the summative quiz (closed book).</a:t>
+            </a:r>
+            <a:endParaRPr lang="en-US" sz="1300" dirty="0"/>
+          </a:p>
+        </p:txBody>
+      </p:sp>
+      <p:sp>
+        <p:nvSpPr>
+          <p:cNvPr id="8" name="Text 6"/>
+          <p:cNvSpPr/>
+          <p:nvPr/>
+        </p:nvSpPr>
+        <p:spPr>
+          <a:xfrm>
+            <a:off x="692051" y="1612255"/>
+            <a:ext cx="7973389" cy="230981"/>
+          </a:xfrm>
+          <a:prstGeom prst="rect">
+            <a:avLst/>
+          </a:prstGeom>
+          <a:noFill/>
+          <a:ln/>
+        </p:spPr>
+        <p:txBody>
+          <a:bodyPr wrap="square" lIns="0" tIns="0" rIns="0" bIns="0" rtlCol="0" anchor="t"/>
+          <a:lstStyle/>
+          <a:p>
+            <a:pPr algn="l" indent="0" marL="0">
+              <a:lnSpc>
+                <a:spcPts val="1820"/>
+              </a:lnSpc>
+              <a:spcBef>
+                <a:spcPts val="300"/>
+              </a:spcBef>
+              <a:spcAft>
+                <a:spcPts val="300"/>
+              </a:spcAft>
+              <a:buNone/>
+            </a:pPr>
+            <a:r>
+              <a:rPr lang="en-US" sz="1300" i="1" dirty="0">
+                <a:solidFill>
+                  <a:srgbClr val="1C2833"/>
+                </a:solidFill>
+                <a:latin typeface="Georgia" pitchFamily="34" charset="0"/>
+                <a:ea typeface="Georgia" pitchFamily="34" charset="-122"/>
+                <a:cs typeface="Georgia" pitchFamily="34" charset="-120"/>
+              </a:rPr>
+              <a:t>2-minute presentation per pair, then 1-min audience question.</a:t>
+            </a:r>
+            <a:endParaRPr lang="en-US" sz="1300" dirty="0"/>
+          </a:p>
+        </p:txBody>
+      </p:sp>
+      <p:sp>
+        <p:nvSpPr>
+          <p:cNvPr id="9" name="Text 7"/>
+          <p:cNvSpPr/>
+          <p:nvPr/>
+        </p:nvSpPr>
+        <p:spPr>
+          <a:xfrm>
+            <a:off x="692051" y="1881336"/>
+            <a:ext cx="7973389" cy="230981"/>
+          </a:xfrm>
+          <a:prstGeom prst="rect">
+            <a:avLst/>
+          </a:prstGeom>
+          <a:noFill/>
+          <a:ln/>
+        </p:spPr>
+        <p:txBody>
+          <a:bodyPr wrap="square" lIns="0" tIns="0" rIns="0" bIns="0" rtlCol="0" anchor="t"/>
+          <a:lstStyle/>
+          <a:p>
+            <a:pPr algn="l" indent="0" marL="0">
+              <a:lnSpc>
+                <a:spcPts val="1820"/>
+              </a:lnSpc>
+              <a:spcBef>
+                <a:spcPts val="300"/>
+              </a:spcBef>
+              <a:spcAft>
+                <a:spcPts val="300"/>
+              </a:spcAft>
+              <a:buNone/>
+            </a:pPr>
+            <a:r>
+              <a:rPr lang="en-US" sz="1300" b="1" i="1" dirty="0">
+                <a:solidFill>
+                  <a:srgbClr val="1C2833"/>
+                </a:solidFill>
+                <a:latin typeface="Georgia" pitchFamily="34" charset="0"/>
+                <a:ea typeface="Georgia" pitchFamily="34" charset="-122"/>
+                <a:cs typeface="Georgia" pitchFamily="34" charset="-120"/>
+              </a:rPr>
+              <a:t>Reflection (due at end of class):</a:t>
+            </a:r>
+            <a:endParaRPr lang="en-US" sz="1300" dirty="0"/>
+          </a:p>
+        </p:txBody>
+      </p:sp>
+      <p:sp>
+        <p:nvSpPr>
+          <p:cNvPr id="10" name="Text 8"/>
+          <p:cNvSpPr/>
+          <p:nvPr/>
+        </p:nvSpPr>
+        <p:spPr>
+          <a:xfrm>
+            <a:off x="692051" y="2150418"/>
+            <a:ext cx="7973389" cy="230981"/>
+          </a:xfrm>
+          <a:prstGeom prst="rect">
+            <a:avLst/>
+          </a:prstGeom>
+          <a:noFill/>
+          <a:ln/>
+        </p:spPr>
+        <p:txBody>
+          <a:bodyPr wrap="square" lIns="0" tIns="0" rIns="0" bIns="0" rtlCol="0" anchor="t"/>
+          <a:lstStyle/>
+          <a:p>
+            <a:pPr algn="l" indent="0" marL="0">
+              <a:lnSpc>
+                <a:spcPts val="1820"/>
+              </a:lnSpc>
+              <a:spcBef>
+                <a:spcPts val="300"/>
+              </a:spcBef>
+              <a:spcAft>
+                <a:spcPts val="300"/>
+              </a:spcAft>
+              <a:buNone/>
+            </a:pPr>
+            <a:r>
+              <a:rPr lang="en-US" sz="1300" i="1" dirty="0">
+                <a:solidFill>
+                  <a:srgbClr val="1C2833"/>
+                </a:solidFill>
+                <a:latin typeface="Georgia" pitchFamily="34" charset="0"/>
+                <a:ea typeface="Georgia" pitchFamily="34" charset="-122"/>
+                <a:cs typeface="Georgia" pitchFamily="34" charset="-120"/>
+              </a:rPr>
+              <a:t>What was the most surprising thing you learned about ×11?</a:t>
+            </a:r>
+            <a:endParaRPr lang="en-US" sz="1300" dirty="0"/>
+          </a:p>
+        </p:txBody>
+      </p:sp>
+      <p:sp>
+        <p:nvSpPr>
+          <p:cNvPr id="11" name="Text 9"/>
+          <p:cNvSpPr/>
+          <p:nvPr/>
+        </p:nvSpPr>
+        <p:spPr>
+          <a:xfrm>
+            <a:off x="692051" y="2419499"/>
+            <a:ext cx="7973389" cy="230981"/>
+          </a:xfrm>
+          <a:prstGeom prst="rect">
+            <a:avLst/>
+          </a:prstGeom>
+          <a:noFill/>
+          <a:ln/>
+        </p:spPr>
+        <p:txBody>
+          <a:bodyPr wrap="square" lIns="0" tIns="0" rIns="0" bIns="0" rtlCol="0" anchor="t"/>
+          <a:lstStyle/>
+          <a:p>
+            <a:pPr algn="l" indent="0" marL="0">
+              <a:lnSpc>
+                <a:spcPts val="1820"/>
+              </a:lnSpc>
+              <a:spcBef>
+                <a:spcPts val="300"/>
+              </a:spcBef>
+              <a:spcAft>
+                <a:spcPts val="300"/>
+              </a:spcAft>
+              <a:buNone/>
+            </a:pPr>
+            <a:r>
+              <a:rPr lang="en-US" sz="1300" i="1" dirty="0">
+                <a:solidFill>
+                  <a:srgbClr val="1C2833"/>
+                </a:solidFill>
+                <a:latin typeface="Georgia" pitchFamily="34" charset="0"/>
+                <a:ea typeface="Georgia" pitchFamily="34" charset="-122"/>
+                <a:cs typeface="Georgia" pitchFamily="34" charset="-120"/>
+              </a:rPr>
+              <a:t>Did your view of "Vedic mathematics" change during this module? How?</a:t>
+            </a:r>
+            <a:endParaRPr lang="en-US" sz="1300" dirty="0"/>
+          </a:p>
+        </p:txBody>
+      </p:sp>
+      <p:sp>
+        <p:nvSpPr>
+          <p:cNvPr id="12" name="Text 10"/>
+          <p:cNvSpPr/>
+          <p:nvPr/>
+        </p:nvSpPr>
+        <p:spPr>
+          <a:xfrm>
+            <a:off x="692051" y="2688580"/>
+            <a:ext cx="7973389" cy="230981"/>
+          </a:xfrm>
+          <a:prstGeom prst="rect">
+            <a:avLst/>
+          </a:prstGeom>
+          <a:noFill/>
+          <a:ln/>
+        </p:spPr>
+        <p:txBody>
+          <a:bodyPr wrap="square" lIns="0" tIns="0" rIns="0" bIns="0" rtlCol="0" anchor="t"/>
+          <a:lstStyle/>
+          <a:p>
+            <a:pPr algn="l" indent="0" marL="0">
+              <a:lnSpc>
+                <a:spcPts val="1820"/>
+              </a:lnSpc>
+              <a:spcBef>
+                <a:spcPts val="300"/>
+              </a:spcBef>
+              <a:spcAft>
+                <a:spcPts val="300"/>
+              </a:spcAft>
+              <a:buNone/>
+            </a:pPr>
+            <a:r>
+              <a:rPr lang="en-US" sz="1300" i="1" dirty="0">
+                <a:solidFill>
+                  <a:srgbClr val="1C2833"/>
+                </a:solidFill>
+                <a:latin typeface="Georgia" pitchFamily="34" charset="0"/>
+                <a:ea typeface="Georgia" pitchFamily="34" charset="-122"/>
+                <a:cs typeface="Georgia" pitchFamily="34" charset="-120"/>
+              </a:rPr>
+              <a:t>If you had three more days, what would you do differently?</a:t>
+            </a:r>
+            <a:endParaRPr lang="en-US" sz="1300" dirty="0"/>
+          </a:p>
+        </p:txBody>
+      </p:sp>
+      <p:sp>
+        <p:nvSpPr>
+          <p:cNvPr id="13" name="Text 11"/>
           <p:cNvSpPr/>
           <p:nvPr/>
         </p:nvSpPr>
